--- a/static/ppts/G8_Sci_Food_Chains_Webs.pptx
+++ b/static/ppts/G8_Sci_Food_Chains_Webs.pptx
@@ -9,9 +9,13 @@
     <p:sldId id="257" r:id="rId3"/>
     <p:sldId id="258" r:id="rId4"/>
     <p:sldId id="259" r:id="rId5"/>
+    <p:sldId id="260" r:id="rId6"/>
+    <p:sldId id="261" r:id="rId7"/>
+    <p:sldId id="262" r:id="rId8"/>
+    <p:sldId id="263" r:id="rId9"/>
   </p:sldIdLst>
   <p:notesMasterIdLst>
-    <p:notesMasterId r:id="rId6"/>
+    <p:notesMasterId r:id="rId10"/>
   </p:notesMasterIdLst>
   <p:sldSz cx="9144000" cy="5143500"/>
   <p:notesSz cx="5143500" cy="9144000"/>
@@ -793,6 +797,358 @@
             <a:fld id="{F7021451-1387-4CA6-816F-3879F97B5CBC}" type="slidenum">
               <a:rPr lang="en-US"/>
               <a:t>4</a:t>
+            </a:fld>
+            <a:endParaRPr lang="en-US"/>
+          </a:p>
+        </p:txBody>
+      </p:sp>
+    </p:spTree>
+    <p:extLst>
+      <p:ext uri="{BB962C8B-B14F-4D97-AF65-F5344CB8AC3E}">
+        <p14:creationId xmlns:p14="http://schemas.microsoft.com/office/powerpoint/2010/main" val="1024086991"/>
+      </p:ext>
+    </p:extLst>
+  </p:cSld>
+  <p:clrMapOvr>
+    <a:masterClrMapping/>
+  </p:clrMapOvr>
+</p:notes>
+</file>
+
+<file path=ppt/notesSlides/notesSlide5.xml><?xml version="1.0" encoding="utf-8"?>
+<p:notes xmlns:a="http://schemas.openxmlformats.org/drawingml/2006/main" xmlns:r="http://schemas.openxmlformats.org/officeDocument/2006/relationships" xmlns:p="http://schemas.openxmlformats.org/presentationml/2006/main">
+  <p:cSld>
+    <p:spTree>
+      <p:nvGrpSpPr>
+        <p:cNvPr id="1" name=""/>
+        <p:cNvGrpSpPr/>
+        <p:nvPr/>
+      </p:nvGrpSpPr>
+      <p:grpSpPr>
+        <a:xfrm>
+          <a:off x="0" y="0"/>
+          <a:ext cx="0" cy="0"/>
+          <a:chOff x="0" y="0"/>
+          <a:chExt cx="0" cy="0"/>
+        </a:xfrm>
+      </p:grpSpPr>
+      <p:sp>
+        <p:nvSpPr>
+          <p:cNvPr id="2" name="Slide Image Placeholder 1"/>
+          <p:cNvSpPr>
+            <a:spLocks noGrp="1" noRot="1" noChangeAspect="1"/>
+          </p:cNvSpPr>
+          <p:nvPr>
+            <p:ph type="sldImg"/>
+          </p:nvPr>
+        </p:nvSpPr>
+        <p:spPr/>
+      </p:sp>
+      <p:sp>
+        <p:nvSpPr>
+          <p:cNvPr id="3" name="Notes Placeholder 2"/>
+          <p:cNvSpPr>
+            <a:spLocks noGrp="1"/>
+          </p:cNvSpPr>
+          <p:nvPr>
+            <p:ph type="body" idx="1"/>
+          </p:nvPr>
+        </p:nvSpPr>
+        <p:spPr/>
+        <p:txBody>
+          <a:bodyPr/>
+          <a:lstStyle/>
+          <a:p>
+            <a:r>
+              <a:rPr lang="en-US" dirty="0"/>
+              <a:t/>
+            </a:r>
+            <a:endParaRPr lang="en-US" dirty="0"/>
+          </a:p>
+        </p:txBody>
+      </p:sp>
+      <p:sp>
+        <p:nvSpPr>
+          <p:cNvPr id="4" name="Slide Number Placeholder 3"/>
+          <p:cNvSpPr>
+            <a:spLocks noGrp="1"/>
+          </p:cNvSpPr>
+          <p:nvPr>
+            <p:ph type="sldNum" sz="quarter" idx="10"/>
+          </p:nvPr>
+        </p:nvSpPr>
+        <p:spPr/>
+        <p:txBody>
+          <a:bodyPr/>
+          <a:lstStyle/>
+          <a:p>
+            <a:fld id="{F7021451-1387-4CA6-816F-3879F97B5CBC}" type="slidenum">
+              <a:rPr lang="en-US"/>
+              <a:t>5</a:t>
+            </a:fld>
+            <a:endParaRPr lang="en-US"/>
+          </a:p>
+        </p:txBody>
+      </p:sp>
+    </p:spTree>
+    <p:extLst>
+      <p:ext uri="{BB962C8B-B14F-4D97-AF65-F5344CB8AC3E}">
+        <p14:creationId xmlns:p14="http://schemas.microsoft.com/office/powerpoint/2010/main" val="1024086991"/>
+      </p:ext>
+    </p:extLst>
+  </p:cSld>
+  <p:clrMapOvr>
+    <a:masterClrMapping/>
+  </p:clrMapOvr>
+</p:notes>
+</file>
+
+<file path=ppt/notesSlides/notesSlide6.xml><?xml version="1.0" encoding="utf-8"?>
+<p:notes xmlns:a="http://schemas.openxmlformats.org/drawingml/2006/main" xmlns:r="http://schemas.openxmlformats.org/officeDocument/2006/relationships" xmlns:p="http://schemas.openxmlformats.org/presentationml/2006/main">
+  <p:cSld>
+    <p:spTree>
+      <p:nvGrpSpPr>
+        <p:cNvPr id="1" name=""/>
+        <p:cNvGrpSpPr/>
+        <p:nvPr/>
+      </p:nvGrpSpPr>
+      <p:grpSpPr>
+        <a:xfrm>
+          <a:off x="0" y="0"/>
+          <a:ext cx="0" cy="0"/>
+          <a:chOff x="0" y="0"/>
+          <a:chExt cx="0" cy="0"/>
+        </a:xfrm>
+      </p:grpSpPr>
+      <p:sp>
+        <p:nvSpPr>
+          <p:cNvPr id="2" name="Slide Image Placeholder 1"/>
+          <p:cNvSpPr>
+            <a:spLocks noGrp="1" noRot="1" noChangeAspect="1"/>
+          </p:cNvSpPr>
+          <p:nvPr>
+            <p:ph type="sldImg"/>
+          </p:nvPr>
+        </p:nvSpPr>
+        <p:spPr/>
+      </p:sp>
+      <p:sp>
+        <p:nvSpPr>
+          <p:cNvPr id="3" name="Notes Placeholder 2"/>
+          <p:cNvSpPr>
+            <a:spLocks noGrp="1"/>
+          </p:cNvSpPr>
+          <p:nvPr>
+            <p:ph type="body" idx="1"/>
+          </p:nvPr>
+        </p:nvSpPr>
+        <p:spPr/>
+        <p:txBody>
+          <a:bodyPr/>
+          <a:lstStyle/>
+          <a:p>
+            <a:r>
+              <a:rPr lang="en-US" dirty="0"/>
+              <a:t/>
+            </a:r>
+            <a:endParaRPr lang="en-US" dirty="0"/>
+          </a:p>
+        </p:txBody>
+      </p:sp>
+      <p:sp>
+        <p:nvSpPr>
+          <p:cNvPr id="4" name="Slide Number Placeholder 3"/>
+          <p:cNvSpPr>
+            <a:spLocks noGrp="1"/>
+          </p:cNvSpPr>
+          <p:nvPr>
+            <p:ph type="sldNum" sz="quarter" idx="10"/>
+          </p:nvPr>
+        </p:nvSpPr>
+        <p:spPr/>
+        <p:txBody>
+          <a:bodyPr/>
+          <a:lstStyle/>
+          <a:p>
+            <a:fld id="{F7021451-1387-4CA6-816F-3879F97B5CBC}" type="slidenum">
+              <a:rPr lang="en-US"/>
+              <a:t>6</a:t>
+            </a:fld>
+            <a:endParaRPr lang="en-US"/>
+          </a:p>
+        </p:txBody>
+      </p:sp>
+    </p:spTree>
+    <p:extLst>
+      <p:ext uri="{BB962C8B-B14F-4D97-AF65-F5344CB8AC3E}">
+        <p14:creationId xmlns:p14="http://schemas.microsoft.com/office/powerpoint/2010/main" val="1024086991"/>
+      </p:ext>
+    </p:extLst>
+  </p:cSld>
+  <p:clrMapOvr>
+    <a:masterClrMapping/>
+  </p:clrMapOvr>
+</p:notes>
+</file>
+
+<file path=ppt/notesSlides/notesSlide7.xml><?xml version="1.0" encoding="utf-8"?>
+<p:notes xmlns:a="http://schemas.openxmlformats.org/drawingml/2006/main" xmlns:r="http://schemas.openxmlformats.org/officeDocument/2006/relationships" xmlns:p="http://schemas.openxmlformats.org/presentationml/2006/main">
+  <p:cSld>
+    <p:spTree>
+      <p:nvGrpSpPr>
+        <p:cNvPr id="1" name=""/>
+        <p:cNvGrpSpPr/>
+        <p:nvPr/>
+      </p:nvGrpSpPr>
+      <p:grpSpPr>
+        <a:xfrm>
+          <a:off x="0" y="0"/>
+          <a:ext cx="0" cy="0"/>
+          <a:chOff x="0" y="0"/>
+          <a:chExt cx="0" cy="0"/>
+        </a:xfrm>
+      </p:grpSpPr>
+      <p:sp>
+        <p:nvSpPr>
+          <p:cNvPr id="2" name="Slide Image Placeholder 1"/>
+          <p:cNvSpPr>
+            <a:spLocks noGrp="1" noRot="1" noChangeAspect="1"/>
+          </p:cNvSpPr>
+          <p:nvPr>
+            <p:ph type="sldImg"/>
+          </p:nvPr>
+        </p:nvSpPr>
+        <p:spPr/>
+      </p:sp>
+      <p:sp>
+        <p:nvSpPr>
+          <p:cNvPr id="3" name="Notes Placeholder 2"/>
+          <p:cNvSpPr>
+            <a:spLocks noGrp="1"/>
+          </p:cNvSpPr>
+          <p:nvPr>
+            <p:ph type="body" idx="1"/>
+          </p:nvPr>
+        </p:nvSpPr>
+        <p:spPr/>
+        <p:txBody>
+          <a:bodyPr/>
+          <a:lstStyle/>
+          <a:p>
+            <a:r>
+              <a:rPr lang="en-US" dirty="0"/>
+              <a:t/>
+            </a:r>
+            <a:endParaRPr lang="en-US" dirty="0"/>
+          </a:p>
+        </p:txBody>
+      </p:sp>
+      <p:sp>
+        <p:nvSpPr>
+          <p:cNvPr id="4" name="Slide Number Placeholder 3"/>
+          <p:cNvSpPr>
+            <a:spLocks noGrp="1"/>
+          </p:cNvSpPr>
+          <p:nvPr>
+            <p:ph type="sldNum" sz="quarter" idx="10"/>
+          </p:nvPr>
+        </p:nvSpPr>
+        <p:spPr/>
+        <p:txBody>
+          <a:bodyPr/>
+          <a:lstStyle/>
+          <a:p>
+            <a:fld id="{F7021451-1387-4CA6-816F-3879F97B5CBC}" type="slidenum">
+              <a:rPr lang="en-US"/>
+              <a:t>7</a:t>
+            </a:fld>
+            <a:endParaRPr lang="en-US"/>
+          </a:p>
+        </p:txBody>
+      </p:sp>
+    </p:spTree>
+    <p:extLst>
+      <p:ext uri="{BB962C8B-B14F-4D97-AF65-F5344CB8AC3E}">
+        <p14:creationId xmlns:p14="http://schemas.microsoft.com/office/powerpoint/2010/main" val="1024086991"/>
+      </p:ext>
+    </p:extLst>
+  </p:cSld>
+  <p:clrMapOvr>
+    <a:masterClrMapping/>
+  </p:clrMapOvr>
+</p:notes>
+</file>
+
+<file path=ppt/notesSlides/notesSlide8.xml><?xml version="1.0" encoding="utf-8"?>
+<p:notes xmlns:a="http://schemas.openxmlformats.org/drawingml/2006/main" xmlns:r="http://schemas.openxmlformats.org/officeDocument/2006/relationships" xmlns:p="http://schemas.openxmlformats.org/presentationml/2006/main">
+  <p:cSld>
+    <p:spTree>
+      <p:nvGrpSpPr>
+        <p:cNvPr id="1" name=""/>
+        <p:cNvGrpSpPr/>
+        <p:nvPr/>
+      </p:nvGrpSpPr>
+      <p:grpSpPr>
+        <a:xfrm>
+          <a:off x="0" y="0"/>
+          <a:ext cx="0" cy="0"/>
+          <a:chOff x="0" y="0"/>
+          <a:chExt cx="0" cy="0"/>
+        </a:xfrm>
+      </p:grpSpPr>
+      <p:sp>
+        <p:nvSpPr>
+          <p:cNvPr id="2" name="Slide Image Placeholder 1"/>
+          <p:cNvSpPr>
+            <a:spLocks noGrp="1" noRot="1" noChangeAspect="1"/>
+          </p:cNvSpPr>
+          <p:nvPr>
+            <p:ph type="sldImg"/>
+          </p:nvPr>
+        </p:nvSpPr>
+        <p:spPr/>
+      </p:sp>
+      <p:sp>
+        <p:nvSpPr>
+          <p:cNvPr id="3" name="Notes Placeholder 2"/>
+          <p:cNvSpPr>
+            <a:spLocks noGrp="1"/>
+          </p:cNvSpPr>
+          <p:nvPr>
+            <p:ph type="body" idx="1"/>
+          </p:nvPr>
+        </p:nvSpPr>
+        <p:spPr/>
+        <p:txBody>
+          <a:bodyPr/>
+          <a:lstStyle/>
+          <a:p>
+            <a:r>
+              <a:rPr lang="en-US" dirty="0"/>
+              <a:t/>
+            </a:r>
+            <a:endParaRPr lang="en-US" dirty="0"/>
+          </a:p>
+        </p:txBody>
+      </p:sp>
+      <p:sp>
+        <p:nvSpPr>
+          <p:cNvPr id="4" name="Slide Number Placeholder 3"/>
+          <p:cNvSpPr>
+            <a:spLocks noGrp="1"/>
+          </p:cNvSpPr>
+          <p:nvPr>
+            <p:ph type="sldNum" sz="quarter" idx="10"/>
+          </p:nvPr>
+        </p:nvSpPr>
+        <p:spPr/>
+        <p:txBody>
+          <a:bodyPr/>
+          <a:lstStyle/>
+          <a:p>
+            <a:fld id="{F7021451-1387-4CA6-816F-3879F97B5CBC}" type="slidenum">
+              <a:rPr lang="en-US"/>
+              <a:t>8</a:t>
             </a:fld>
             <a:endParaRPr lang="en-US"/>
           </a:p>
@@ -1170,7 +1526,7 @@
             <a:avLst/>
           </a:prstGeom>
           <a:solidFill>
-            <a:srgbClr val="1B2A4A"/>
+            <a:srgbClr val="E9C46A"/>
           </a:solidFill>
           <a:ln/>
         </p:spPr>
@@ -1202,7 +1558,7 @@
             <a:r>
               <a:rPr lang="en-US" sz="1400" b="1" spc="400" kern="0" dirty="0">
                 <a:solidFill>
-                  <a:srgbClr val="1B2A4A"/>
+                  <a:srgbClr val="E9C46A"/>
                 </a:solidFill>
                 <a:latin typeface="Calibri" pitchFamily="34" charset="0"/>
                 <a:ea typeface="Calibri" pitchFamily="34" charset="-122"/>
@@ -1247,38 +1603,55 @@
                 <a:ea typeface="Georgia" pitchFamily="34" charset="-122"/>
                 <a:cs typeface="Georgia" pitchFamily="34" charset="-120"/>
               </a:rPr>
-              <a:t>Food Chains &amp; Food Webs</a:t>
+              <a:t>Food Chains</a:t>
             </a:r>
             <a:endParaRPr lang="en-US" sz="4000" dirty="0"/>
           </a:p>
-        </p:txBody>
-      </p:sp>
-      <p:sp>
-        <p:nvSpPr>
-          <p:cNvPr id="6" name="Text 4"/>
-          <p:cNvSpPr/>
-          <p:nvPr/>
-        </p:nvSpPr>
-        <p:spPr>
-          <a:xfrm>
-            <a:off x="731520" y="3200400"/>
-            <a:ext cx="7680960" cy="548640"/>
-          </a:xfrm>
-          <a:prstGeom prst="rect">
-            <a:avLst/>
-          </a:prstGeom>
-          <a:noFill/>
-          <a:ln/>
-        </p:spPr>
-        <p:txBody>
-          <a:bodyPr wrap="square" rtlCol="0" anchor="ctr"/>
-          <a:lstStyle/>
           <a:p>
             <a:pPr indent="0" marL="0">
               <a:buNone/>
             </a:pPr>
             <a:r>
-              <a:rPr lang="en-US" sz="1600" dirty="0">
+              <a:rPr lang="en-US" sz="4000" b="1" dirty="0">
+                <a:solidFill>
+                  <a:srgbClr val="FFFFFF"/>
+                </a:solidFill>
+                <a:latin typeface="Georgia" pitchFamily="34" charset="0"/>
+                <a:ea typeface="Georgia" pitchFamily="34" charset="-122"/>
+                <a:cs typeface="Georgia" pitchFamily="34" charset="-120"/>
+              </a:rPr>
+              <a:t>&amp; Food Webs</a:t>
+            </a:r>
+            <a:endParaRPr lang="en-US" sz="4000" dirty="0"/>
+          </a:p>
+        </p:txBody>
+      </p:sp>
+      <p:sp>
+        <p:nvSpPr>
+          <p:cNvPr id="6" name="Text 4"/>
+          <p:cNvSpPr/>
+          <p:nvPr/>
+        </p:nvSpPr>
+        <p:spPr>
+          <a:xfrm>
+            <a:off x="731520" y="3200400"/>
+            <a:ext cx="7680960" cy="548640"/>
+          </a:xfrm>
+          <a:prstGeom prst="rect">
+            <a:avLst/>
+          </a:prstGeom>
+          <a:noFill/>
+          <a:ln/>
+        </p:spPr>
+        <p:txBody>
+          <a:bodyPr wrap="square" rtlCol="0" anchor="ctr"/>
+          <a:lstStyle/>
+          <a:p>
+            <a:pPr indent="0" marL="0">
+              <a:buNone/>
+            </a:pPr>
+            <a:r>
+              <a:rPr lang="en-US" sz="1600" i="1" dirty="0">
                 <a:solidFill>
                   <a:srgbClr val="9B9690"/>
                 </a:solidFill>
@@ -1286,7 +1659,7 @@
                 <a:ea typeface="Calibri" pitchFamily="34" charset="-122"/>
                 <a:cs typeface="Calibri" pitchFamily="34" charset="-120"/>
               </a:rPr>
-              <a:t>How energy flows through ecosystems</a:t>
+              <a:t>Who eats whom?</a:t>
             </a:r>
             <a:endParaRPr lang="en-US" sz="1600" dirty="0"/>
           </a:p>
@@ -1317,7 +1690,7 @@
               <a:buNone/>
             </a:pPr>
             <a:r>
-              <a:rPr lang="en-US" sz="1100" dirty="0">
+              <a:rPr lang="en-US" sz="1200" dirty="0">
                 <a:solidFill>
                   <a:srgbClr val="6B6660"/>
                 </a:solidFill>
@@ -1325,9 +1698,9 @@
                 <a:ea typeface="Calibri" pitchFamily="34" charset="-122"/>
                 <a:cs typeface="Calibri" pitchFamily="34" charset="-120"/>
               </a:rPr>
-              <a:t>Mr Zocchi · NIS</a:t>
-            </a:r>
-            <a:endParaRPr lang="en-US" sz="1100" dirty="0"/>
+              <a:t>Mr Zocchi</a:t>
+            </a:r>
+            <a:endParaRPr lang="en-US" sz="1200" dirty="0"/>
           </a:p>
         </p:txBody>
       </p:sp>
@@ -1371,30 +1744,51 @@
             <a:avLst/>
           </a:prstGeom>
           <a:solidFill>
-            <a:srgbClr val="FAF8F5"/>
+            <a:srgbClr val="111D35"/>
           </a:solidFill>
           <a:ln/>
         </p:spPr>
       </p:sp>
       <p:sp>
         <p:nvSpPr>
-          <p:cNvPr id="3" name="Shape 1"/>
-          <p:cNvSpPr/>
-          <p:nvPr/>
-        </p:nvSpPr>
-        <p:spPr>
-          <a:xfrm>
-            <a:off x="0" y="0"/>
-            <a:ext cx="9144000" cy="54864"/>
-          </a:xfrm>
-          <a:prstGeom prst="rect">
-            <a:avLst/>
-          </a:prstGeom>
-          <a:solidFill>
-            <a:srgbClr val="1B2A4A"/>
-          </a:solidFill>
-          <a:ln/>
-        </p:spPr>
+          <p:cNvPr id="3" name="Text 1"/>
+          <p:cNvSpPr/>
+          <p:nvPr/>
+        </p:nvSpPr>
+        <p:spPr>
+          <a:xfrm>
+            <a:off x="6858000" y="182880"/>
+            <a:ext cx="2286000" cy="2743200"/>
+          </a:xfrm>
+          <a:prstGeom prst="rect">
+            <a:avLst/>
+          </a:prstGeom>
+          <a:noFill/>
+          <a:ln/>
+        </p:spPr>
+        <p:txBody>
+          <a:bodyPr wrap="square" rtlCol="0" anchor="ctr"/>
+          <a:lstStyle/>
+          <a:p>
+            <a:pPr algn="ctr" indent="0" marL="0">
+              <a:buNone/>
+            </a:pPr>
+            <a:r>
+              <a:rPr lang="en-US" sz="16000" b="1" dirty="0">
+                <a:solidFill>
+                  <a:srgbClr val="E9C46A">
+                    <a:alpha val="80000"/>
+                  </a:srgbClr>
+                </a:solidFill>
+                <a:latin typeface="Georgia" pitchFamily="34" charset="0"/>
+                <a:ea typeface="Georgia" pitchFamily="34" charset="-122"/>
+                <a:cs typeface="Georgia" pitchFamily="34" charset="-120"/>
+              </a:rPr>
+              <a:t>?</a:t>
+            </a:r>
+            <a:endParaRPr lang="en-US" sz="16000" dirty="0"/>
+          </a:p>
+        </p:txBody>
       </p:sp>
       <p:sp>
         <p:nvSpPr>
@@ -1404,8 +1798,8 @@
         </p:nvSpPr>
         <p:spPr>
           <a:xfrm>
-            <a:off x="640080" y="320040"/>
-            <a:ext cx="7863840" cy="548640"/>
+            <a:off x="731520" y="548640"/>
+            <a:ext cx="2743200" cy="365760"/>
           </a:xfrm>
           <a:prstGeom prst="rect">
             <a:avLst/>
@@ -1414,14 +1808,347 @@
           <a:ln/>
         </p:spPr>
         <p:txBody>
-          <a:bodyPr wrap="square" lIns="0" tIns="0" rIns="0" bIns="0" rtlCol="0" anchor="ctr"/>
+          <a:bodyPr wrap="square" rtlCol="0" anchor="ctr"/>
           <a:lstStyle/>
           <a:p>
             <a:pPr indent="0" marL="0">
               <a:buNone/>
             </a:pPr>
             <a:r>
-              <a:rPr lang="en-US" sz="2600" b="1" dirty="0">
+              <a:rPr lang="en-US" sz="1200" b="1" spc="400" kern="0" dirty="0">
+                <a:solidFill>
+                  <a:srgbClr val="E9C46A"/>
+                </a:solidFill>
+                <a:latin typeface="Calibri" pitchFamily="34" charset="0"/>
+                <a:ea typeface="Calibri" pitchFamily="34" charset="-122"/>
+                <a:cs typeface="Calibri" pitchFamily="34" charset="-120"/>
+              </a:rPr>
+              <a:t>INQUIRY</a:t>
+            </a:r>
+            <a:endParaRPr lang="en-US" sz="1200" dirty="0"/>
+          </a:p>
+        </p:txBody>
+      </p:sp>
+      <p:sp>
+        <p:nvSpPr>
+          <p:cNvPr id="5" name="Text 3"/>
+          <p:cNvSpPr/>
+          <p:nvPr/>
+        </p:nvSpPr>
+        <p:spPr>
+          <a:xfrm>
+            <a:off x="731520" y="1005840"/>
+            <a:ext cx="6858000" cy="1463040"/>
+          </a:xfrm>
+          <a:prstGeom prst="rect">
+            <a:avLst/>
+          </a:prstGeom>
+          <a:noFill/>
+          <a:ln/>
+        </p:spPr>
+        <p:txBody>
+          <a:bodyPr wrap="square" rtlCol="0" anchor="t"/>
+          <a:lstStyle/>
+          <a:p>
+            <a:pPr indent="0" marL="0">
+              <a:buNone/>
+            </a:pPr>
+            <a:r>
+              <a:rPr lang="en-US" sz="2800" b="1" dirty="0">
+                <a:solidFill>
+                  <a:srgbClr val="FFFFFF"/>
+                </a:solidFill>
+                <a:latin typeface="Georgia" pitchFamily="34" charset="0"/>
+                <a:ea typeface="Georgia" pitchFamily="34" charset="-122"/>
+                <a:cs typeface="Georgia" pitchFamily="34" charset="-120"/>
+              </a:rPr>
+              <a:t>In the Yangtze River, what would happen if the Chinese paddlefish went extinct?</a:t>
+            </a:r>
+            <a:endParaRPr lang="en-US" sz="2800" dirty="0"/>
+          </a:p>
+        </p:txBody>
+      </p:sp>
+      <p:sp>
+        <p:nvSpPr>
+          <p:cNvPr id="6" name="Text 4"/>
+          <p:cNvSpPr/>
+          <p:nvPr/>
+        </p:nvSpPr>
+        <p:spPr>
+          <a:xfrm>
+            <a:off x="731520" y="2560320"/>
+            <a:ext cx="6858000" cy="548640"/>
+          </a:xfrm>
+          <a:prstGeom prst="rect">
+            <a:avLst/>
+          </a:prstGeom>
+          <a:noFill/>
+          <a:ln/>
+        </p:spPr>
+        <p:txBody>
+          <a:bodyPr wrap="square" rtlCol="0" anchor="ctr"/>
+          <a:lstStyle/>
+          <a:p>
+            <a:pPr indent="0" marL="0">
+              <a:buNone/>
+            </a:pPr>
+            <a:r>
+              <a:rPr lang="en-US" sz="1400" i="1" dirty="0">
+                <a:solidFill>
+                  <a:srgbClr val="9B9690"/>
+                </a:solidFill>
+                <a:latin typeface="Calibri" pitchFamily="34" charset="0"/>
+                <a:ea typeface="Calibri" pitchFamily="34" charset="-122"/>
+                <a:cs typeface="Calibri" pitchFamily="34" charset="-120"/>
+              </a:rPr>
+              <a:t>The Chinese paddlefish was declared extinct in 2022 — it was a top predator.</a:t>
+            </a:r>
+            <a:endParaRPr lang="en-US" sz="1400" dirty="0"/>
+          </a:p>
+        </p:txBody>
+      </p:sp>
+      <p:sp>
+        <p:nvSpPr>
+          <p:cNvPr id="7" name="Shape 5"/>
+          <p:cNvSpPr/>
+          <p:nvPr/>
+        </p:nvSpPr>
+        <p:spPr>
+          <a:xfrm>
+            <a:off x="548640" y="3200400"/>
+            <a:ext cx="7315200" cy="1645920"/>
+          </a:xfrm>
+          <a:prstGeom prst="rect">
+            <a:avLst/>
+          </a:prstGeom>
+          <a:solidFill>
+            <a:srgbClr val="243660"/>
+          </a:solidFill>
+          <a:ln/>
+        </p:spPr>
+      </p:sp>
+      <p:sp>
+        <p:nvSpPr>
+          <p:cNvPr id="8" name="Text 6"/>
+          <p:cNvSpPr/>
+          <p:nvPr/>
+        </p:nvSpPr>
+        <p:spPr>
+          <a:xfrm>
+            <a:off x="731520" y="3246120"/>
+            <a:ext cx="3657600" cy="320040"/>
+          </a:xfrm>
+          <a:prstGeom prst="rect">
+            <a:avLst/>
+          </a:prstGeom>
+          <a:noFill/>
+          <a:ln/>
+        </p:spPr>
+        <p:txBody>
+          <a:bodyPr wrap="square" rtlCol="0" anchor="ctr"/>
+          <a:lstStyle/>
+          <a:p>
+            <a:pPr indent="0" marL="0">
+              <a:buNone/>
+            </a:pPr>
+            <a:r>
+              <a:rPr lang="en-US" sz="1100" b="1" spc="200" kern="0" dirty="0">
+                <a:solidFill>
+                  <a:srgbClr val="E9C46A"/>
+                </a:solidFill>
+                <a:latin typeface="Calibri" pitchFamily="34" charset="0"/>
+                <a:ea typeface="Calibri" pitchFamily="34" charset="-122"/>
+                <a:cs typeface="Calibri" pitchFamily="34" charset="-120"/>
+              </a:rPr>
+              <a:t>Think — Pair — Share</a:t>
+            </a:r>
+            <a:endParaRPr lang="en-US" sz="1100" dirty="0"/>
+          </a:p>
+        </p:txBody>
+      </p:sp>
+      <p:sp>
+        <p:nvSpPr>
+          <p:cNvPr id="9" name="Text 7"/>
+          <p:cNvSpPr/>
+          <p:nvPr/>
+        </p:nvSpPr>
+        <p:spPr>
+          <a:xfrm>
+            <a:off x="731520" y="3566160"/>
+            <a:ext cx="6949440" cy="1188720"/>
+          </a:xfrm>
+          <a:prstGeom prst="rect">
+            <a:avLst/>
+          </a:prstGeom>
+          <a:noFill/>
+          <a:ln/>
+        </p:spPr>
+        <p:txBody>
+          <a:bodyPr wrap="square" rtlCol="0" anchor="ctr"/>
+          <a:lstStyle/>
+          <a:p>
+            <a:pPr marL="342900" indent="-342900">
+              <a:spcAft>
+                <a:spcPts val="600"/>
+              </a:spcAft>
+              <a:buSzPct val="100000"/>
+              <a:buChar char="•"/>
+            </a:pPr>
+            <a:r>
+              <a:rPr lang="en-US" sz="1400" dirty="0">
+                <a:solidFill>
+                  <a:srgbClr val="E5E2DC"/>
+                </a:solidFill>
+                <a:latin typeface="Calibri" pitchFamily="34" charset="0"/>
+                <a:ea typeface="Calibri" pitchFamily="34" charset="-122"/>
+                <a:cs typeface="Calibri" pitchFamily="34" charset="-120"/>
+              </a:rPr>
+              <a:t>What organisms depended on the paddlefish?</a:t>
+            </a:r>
+            <a:endParaRPr lang="en-US" sz="1400" dirty="0"/>
+          </a:p>
+          <a:p>
+            <a:pPr marL="342900" indent="-342900">
+              <a:spcAft>
+                <a:spcPts val="600"/>
+              </a:spcAft>
+              <a:buSzPct val="100000"/>
+              <a:buChar char="•"/>
+            </a:pPr>
+            <a:r>
+              <a:rPr lang="en-US" sz="1400" dirty="0">
+                <a:solidFill>
+                  <a:srgbClr val="E5E2DC"/>
+                </a:solidFill>
+                <a:latin typeface="Calibri" pitchFamily="34" charset="0"/>
+                <a:ea typeface="Calibri" pitchFamily="34" charset="-122"/>
+                <a:cs typeface="Calibri" pitchFamily="34" charset="-120"/>
+              </a:rPr>
+              <a:t>What organisms did the paddlefish eat?</a:t>
+            </a:r>
+            <a:endParaRPr lang="en-US" sz="1400" dirty="0"/>
+          </a:p>
+          <a:p>
+            <a:pPr marL="342900" indent="-342900">
+              <a:spcAft>
+                <a:spcPts val="600"/>
+              </a:spcAft>
+              <a:buSzPct val="100000"/>
+              <a:buChar char="•"/>
+            </a:pPr>
+            <a:r>
+              <a:rPr lang="en-US" sz="1400" dirty="0">
+                <a:solidFill>
+                  <a:srgbClr val="E5E2DC"/>
+                </a:solidFill>
+                <a:latin typeface="Calibri" pitchFamily="34" charset="0"/>
+                <a:ea typeface="Calibri" pitchFamily="34" charset="-122"/>
+                <a:cs typeface="Calibri" pitchFamily="34" charset="-120"/>
+              </a:rPr>
+              <a:t>How does removing a top predator change the whole system?</a:t>
+            </a:r>
+            <a:endParaRPr lang="en-US" sz="1400" dirty="0"/>
+          </a:p>
+        </p:txBody>
+      </p:sp>
+    </p:spTree>
+  </p:cSld>
+  <p:clrMapOvr>
+    <a:masterClrMapping/>
+  </p:clrMapOvr>
+</p:sld>
+</file>
+
+<file path=ppt/slides/slide3.xml><?xml version="1.0" encoding="utf-8"?>
+<p:sld xmlns:a="http://schemas.openxmlformats.org/drawingml/2006/main" xmlns:r="http://schemas.openxmlformats.org/officeDocument/2006/relationships" xmlns:p="http://schemas.openxmlformats.org/presentationml/2006/main">
+  <p:cSld name="Slide 3">
+    <p:bg>
+      <p:bgPr>
+        <a:solidFill>
+          <a:srgbClr val="FAF8F5"/>
+        </a:solidFill>
+      </p:bgPr>
+    </p:bg>
+    <p:spTree>
+      <p:nvGrpSpPr>
+        <p:cNvPr id="1" name=""/>
+        <p:cNvGrpSpPr/>
+        <p:nvPr/>
+      </p:nvGrpSpPr>
+      <p:grpSpPr>
+        <a:xfrm>
+          <a:off x="0" y="0"/>
+          <a:ext cx="0" cy="0"/>
+          <a:chOff x="0" y="0"/>
+          <a:chExt cx="0" cy="0"/>
+        </a:xfrm>
+      </p:grpSpPr>
+      <p:sp>
+        <p:nvSpPr>
+          <p:cNvPr id="2" name="Shape 0"/>
+          <p:cNvSpPr/>
+          <p:nvPr/>
+        </p:nvSpPr>
+        <p:spPr>
+          <a:xfrm>
+            <a:off x="0" y="0"/>
+            <a:ext cx="9144000" cy="822960"/>
+          </a:xfrm>
+          <a:prstGeom prst="rect">
+            <a:avLst/>
+          </a:prstGeom>
+          <a:solidFill>
+            <a:srgbClr val="FFFFFF"/>
+          </a:solidFill>
+          <a:ln/>
+        </p:spPr>
+      </p:sp>
+      <p:sp>
+        <p:nvSpPr>
+          <p:cNvPr id="3" name="Shape 1"/>
+          <p:cNvSpPr/>
+          <p:nvPr/>
+        </p:nvSpPr>
+        <p:spPr>
+          <a:xfrm>
+            <a:off x="0" y="795528"/>
+            <a:ext cx="9144000" cy="27432"/>
+          </a:xfrm>
+          <a:prstGeom prst="rect">
+            <a:avLst/>
+          </a:prstGeom>
+          <a:solidFill>
+            <a:srgbClr val="E9C46A"/>
+          </a:solidFill>
+          <a:ln/>
+        </p:spPr>
+      </p:sp>
+      <p:sp>
+        <p:nvSpPr>
+          <p:cNvPr id="4" name="Text 2"/>
+          <p:cNvSpPr/>
+          <p:nvPr/>
+        </p:nvSpPr>
+        <p:spPr>
+          <a:xfrm>
+            <a:off x="640080" y="91440"/>
+            <a:ext cx="7863840" cy="640080"/>
+          </a:xfrm>
+          <a:prstGeom prst="rect">
+            <a:avLst/>
+          </a:prstGeom>
+          <a:noFill/>
+          <a:ln/>
+        </p:spPr>
+        <p:txBody>
+          <a:bodyPr wrap="square" lIns="0" tIns="0" rIns="0" bIns="0" rtlCol="0" anchor="ctr"/>
+          <a:lstStyle/>
+          <a:p>
+            <a:pPr indent="0" marL="0">
+              <a:buNone/>
+            </a:pPr>
+            <a:r>
+              <a:rPr lang="en-US" sz="2200" b="1" dirty="0">
                 <a:solidFill>
                   <a:srgbClr val="1B2A4A"/>
                 </a:solidFill>
@@ -1429,15 +2156,253 @@
                 <a:ea typeface="Georgia" pitchFamily="34" charset="-122"/>
                 <a:cs typeface="Georgia" pitchFamily="34" charset="-120"/>
               </a:rPr>
-              <a:t>Trophic Levels</a:t>
-            </a:r>
-            <a:endParaRPr lang="en-US" sz="2600" dirty="0"/>
+              <a:t>Food Chains</a:t>
+            </a:r>
+            <a:endParaRPr lang="en-US" sz="2200" dirty="0"/>
+          </a:p>
+        </p:txBody>
+      </p:sp>
+      <p:sp>
+        <p:nvSpPr>
+          <p:cNvPr id="5" name="Text 3"/>
+          <p:cNvSpPr/>
+          <p:nvPr/>
+        </p:nvSpPr>
+        <p:spPr>
+          <a:xfrm>
+            <a:off x="640080" y="1005840"/>
+            <a:ext cx="7863840" cy="2926080"/>
+          </a:xfrm>
+          <a:prstGeom prst="rect">
+            <a:avLst/>
+          </a:prstGeom>
+          <a:noFill/>
+          <a:ln/>
+        </p:spPr>
+        <p:txBody>
+          <a:bodyPr wrap="square" rtlCol="0" anchor="ctr"/>
+          <a:lstStyle/>
+          <a:p>
+            <a:pPr marL="342900" indent="-342900">
+              <a:spcAft>
+                <a:spcPts val="800"/>
+              </a:spcAft>
+              <a:buSzPct val="100000"/>
+              <a:buChar char="•"/>
+            </a:pPr>
+            <a:r>
+              <a:rPr lang="en-US" sz="1600" dirty="0">
+                <a:solidFill>
+                  <a:srgbClr val="3D3A36"/>
+                </a:solidFill>
+                <a:latin typeface="Calibri" pitchFamily="34" charset="0"/>
+                <a:ea typeface="Calibri" pitchFamily="34" charset="-122"/>
+                <a:cs typeface="Calibri" pitchFamily="34" charset="-120"/>
+              </a:rPr>
+              <a:t>Shows energy flow from one organism to the next.</a:t>
+            </a:r>
+            <a:endParaRPr lang="en-US" sz="1600" dirty="0"/>
+          </a:p>
+          <a:p>
+            <a:pPr marL="342900" indent="-342900">
+              <a:spcAft>
+                <a:spcPts val="800"/>
+              </a:spcAft>
+              <a:buSzPct val="100000"/>
+              <a:buChar char="•"/>
+            </a:pPr>
+            <a:r>
+              <a:rPr lang="en-US" sz="1600" dirty="0">
+                <a:solidFill>
+                  <a:srgbClr val="3D3A36"/>
+                </a:solidFill>
+                <a:latin typeface="Calibri" pitchFamily="34" charset="0"/>
+                <a:ea typeface="Calibri" pitchFamily="34" charset="-122"/>
+                <a:cs typeface="Calibri" pitchFamily="34" charset="-120"/>
+              </a:rPr>
+              <a:t>Always starts with a PRODUCER (plant or algae).</a:t>
+            </a:r>
+            <a:endParaRPr lang="en-US" sz="1600" dirty="0"/>
+          </a:p>
+          <a:p>
+            <a:pPr marL="342900" indent="-342900">
+              <a:spcAft>
+                <a:spcPts val="800"/>
+              </a:spcAft>
+              <a:buSzPct val="100000"/>
+              <a:buChar char="•"/>
+            </a:pPr>
+            <a:r>
+              <a:rPr lang="en-US" sz="1600" dirty="0">
+                <a:solidFill>
+                  <a:srgbClr val="3D3A36"/>
+                </a:solidFill>
+                <a:latin typeface="Calibri" pitchFamily="34" charset="0"/>
+                <a:ea typeface="Calibri" pitchFamily="34" charset="-122"/>
+                <a:cs typeface="Calibri" pitchFamily="34" charset="-120"/>
+              </a:rPr>
+              <a:t>Arrows show direction energy flows → (eaten by).</a:t>
+            </a:r>
+            <a:endParaRPr lang="en-US" sz="1600" dirty="0"/>
+          </a:p>
+          <a:p>
+            <a:pPr marL="342900" indent="-342900">
+              <a:spcAft>
+                <a:spcPts val="800"/>
+              </a:spcAft>
+              <a:buSzPct val="100000"/>
+              <a:buChar char="•"/>
+            </a:pPr>
+            <a:r>
+              <a:rPr lang="en-US" sz="1600" dirty="0">
+                <a:solidFill>
+                  <a:srgbClr val="3D3A36"/>
+                </a:solidFill>
+                <a:latin typeface="Calibri" pitchFamily="34" charset="0"/>
+                <a:ea typeface="Calibri" pitchFamily="34" charset="-122"/>
+                <a:cs typeface="Calibri" pitchFamily="34" charset="-120"/>
+              </a:rPr>
+              <a:t>Example: Algae → Small fish → Carp → Heron.</a:t>
+            </a:r>
+            <a:endParaRPr lang="en-US" sz="1600" dirty="0"/>
+          </a:p>
+          <a:p>
+            <a:pPr marL="342900" indent="-342900">
+              <a:spcAft>
+                <a:spcPts val="800"/>
+              </a:spcAft>
+              <a:buSzPct val="100000"/>
+              <a:buChar char="•"/>
+            </a:pPr>
+            <a:r>
+              <a:rPr lang="en-US" sz="1600" dirty="0">
+                <a:solidFill>
+                  <a:srgbClr val="3D3A36"/>
+                </a:solidFill>
+                <a:latin typeface="Calibri" pitchFamily="34" charset="0"/>
+                <a:ea typeface="Calibri" pitchFamily="34" charset="-122"/>
+                <a:cs typeface="Calibri" pitchFamily="34" charset="-120"/>
+              </a:rPr>
+              <a:t>Each step = a trophic level.</a:t>
+            </a:r>
+            <a:endParaRPr lang="en-US" sz="1600" dirty="0"/>
+          </a:p>
+        </p:txBody>
+      </p:sp>
+    </p:spTree>
+  </p:cSld>
+  <p:clrMapOvr>
+    <a:masterClrMapping/>
+  </p:clrMapOvr>
+</p:sld>
+</file>
+
+<file path=ppt/slides/slide4.xml><?xml version="1.0" encoding="utf-8"?>
+<p:sld xmlns:a="http://schemas.openxmlformats.org/drawingml/2006/main" xmlns:r="http://schemas.openxmlformats.org/officeDocument/2006/relationships" xmlns:p="http://schemas.openxmlformats.org/presentationml/2006/main">
+  <p:cSld name="Slide 4">
+    <p:bg>
+      <p:bgPr>
+        <a:solidFill>
+          <a:srgbClr val="FAF8F5"/>
+        </a:solidFill>
+      </p:bgPr>
+    </p:bg>
+    <p:spTree>
+      <p:nvGrpSpPr>
+        <p:cNvPr id="1" name=""/>
+        <p:cNvGrpSpPr/>
+        <p:nvPr/>
+      </p:nvGrpSpPr>
+      <p:grpSpPr>
+        <a:xfrm>
+          <a:off x="0" y="0"/>
+          <a:ext cx="0" cy="0"/>
+          <a:chOff x="0" y="0"/>
+          <a:chExt cx="0" cy="0"/>
+        </a:xfrm>
+      </p:grpSpPr>
+      <p:sp>
+        <p:nvSpPr>
+          <p:cNvPr id="2" name="Shape 0"/>
+          <p:cNvSpPr/>
+          <p:nvPr/>
+        </p:nvSpPr>
+        <p:spPr>
+          <a:xfrm>
+            <a:off x="0" y="0"/>
+            <a:ext cx="9144000" cy="822960"/>
+          </a:xfrm>
+          <a:prstGeom prst="rect">
+            <a:avLst/>
+          </a:prstGeom>
+          <a:solidFill>
+            <a:srgbClr val="FFFFFF"/>
+          </a:solidFill>
+          <a:ln/>
+        </p:spPr>
+      </p:sp>
+      <p:sp>
+        <p:nvSpPr>
+          <p:cNvPr id="3" name="Shape 1"/>
+          <p:cNvSpPr/>
+          <p:nvPr/>
+        </p:nvSpPr>
+        <p:spPr>
+          <a:xfrm>
+            <a:off x="0" y="795528"/>
+            <a:ext cx="9144000" cy="27432"/>
+          </a:xfrm>
+          <a:prstGeom prst="rect">
+            <a:avLst/>
+          </a:prstGeom>
+          <a:solidFill>
+            <a:srgbClr val="E9C46A"/>
+          </a:solidFill>
+          <a:ln/>
+        </p:spPr>
+      </p:sp>
+      <p:sp>
+        <p:nvSpPr>
+          <p:cNvPr id="4" name="Text 2"/>
+          <p:cNvSpPr/>
+          <p:nvPr/>
+        </p:nvSpPr>
+        <p:spPr>
+          <a:xfrm>
+            <a:off x="640080" y="91440"/>
+            <a:ext cx="7863840" cy="640080"/>
+          </a:xfrm>
+          <a:prstGeom prst="rect">
+            <a:avLst/>
+          </a:prstGeom>
+          <a:noFill/>
+          <a:ln/>
+        </p:spPr>
+        <p:txBody>
+          <a:bodyPr wrap="square" lIns="0" tIns="0" rIns="0" bIns="0" rtlCol="0" anchor="ctr"/>
+          <a:lstStyle/>
+          <a:p>
+            <a:pPr indent="0" marL="0">
+              <a:buNone/>
+            </a:pPr>
+            <a:r>
+              <a:rPr lang="en-US" sz="2200" b="1" dirty="0">
+                <a:solidFill>
+                  <a:srgbClr val="1B2A4A"/>
+                </a:solidFill>
+                <a:latin typeface="Georgia" pitchFamily="34" charset="0"/>
+                <a:ea typeface="Georgia" pitchFamily="34" charset="-122"/>
+                <a:cs typeface="Georgia" pitchFamily="34" charset="-120"/>
+              </a:rPr>
+              <a:t>Key Vocabulary</a:t>
+            </a:r>
+            <a:endParaRPr lang="en-US" sz="2200" dirty="0"/>
           </a:p>
         </p:txBody>
       </p:sp>
       <p:graphicFrame>
         <p:nvGraphicFramePr>
-          <p:cNvPr id="3" name="Table 0"/>
+          <p:cNvPr id="5" name="Table 0"/>
           <p:cNvGraphicFramePr>
             <a:graphicFrameLocks noGrp="1"/>
           </p:cNvGraphicFramePr>
@@ -1450,7 +2415,7 @@
           </p:nvPr>
         </p:nvGraphicFramePr>
         <p:xfrm>
-          <a:off x="640080" y="1051560"/>
+          <a:off x="640080" y="1005840"/>
           <a:ext cx="7863840" cy="914400"/>
         </p:xfrm>
         <a:graphic>
@@ -1458,11 +2423,10 @@
             <a:tbl>
               <a:tblPr/>
               <a:tblGrid>
-                <a:gridCol w="2621280"/>
-                <a:gridCol w="2621280"/>
-                <a:gridCol w="2621280"/>
+                <a:gridCol w="2286000"/>
+                <a:gridCol w="5577840"/>
               </a:tblGrid>
-              <a:tr h="502920">
+              <a:tr h="457200">
                 <a:tc>
                   <a:txBody>
                     <a:bodyPr/>
@@ -1472,7 +2436,7 @@
                         <a:buNone/>
                       </a:pPr>
                       <a:r>
-                        <a:rPr lang="en-US" sz="1200" b="1" dirty="0">
+                        <a:rPr lang="en-US" sz="1300" b="1" dirty="0">
                           <a:solidFill>
                             <a:srgbClr val="FFFFFF"/>
                           </a:solidFill>
@@ -1480,9 +2444,9 @@
                           <a:ea typeface="Calibri" pitchFamily="34" charset="-122"/>
                           <a:cs typeface="Calibri" pitchFamily="34" charset="-120"/>
                         </a:rPr>
-                        <a:t>Level</a:t>
+                        <a:t>Term</a:t>
                       </a:r>
-                      <a:endParaRPr lang="en-US" sz="1200" dirty="0">
+                      <a:endParaRPr lang="en-US" sz="1300" dirty="0">
                         <a:latin typeface="Calibri" charset="0"/>
                         <a:ea typeface="Calibri" charset="0"/>
                         <a:cs typeface="Calibri" charset="0"/>
@@ -1527,7 +2491,7 @@
                       <a:tailEnd type="none" w="med" len="med"/>
                     </a:lnB>
                     <a:solidFill>
-                      <a:srgbClr val="1B2A4A"/>
+                      <a:srgbClr val="E9C46A"/>
                     </a:solidFill>
                   </a:tcPr>
                 </a:tc>
@@ -1540,7 +2504,7 @@
                         <a:buNone/>
                       </a:pPr>
                       <a:r>
-                        <a:rPr lang="en-US" sz="1200" b="1" dirty="0">
+                        <a:rPr lang="en-US" sz="1300" b="1" dirty="0">
                           <a:solidFill>
                             <a:srgbClr val="FFFFFF"/>
                           </a:solidFill>
@@ -1548,9 +2512,9 @@
                           <a:ea typeface="Calibri" pitchFamily="34" charset="-122"/>
                           <a:cs typeface="Calibri" pitchFamily="34" charset="-120"/>
                         </a:rPr>
-                        <a:t>Role</a:t>
+                        <a:t>Definition</a:t>
                       </a:r>
-                      <a:endParaRPr lang="en-US" sz="1200" dirty="0">
+                      <a:endParaRPr lang="en-US" sz="1300" dirty="0">
                         <a:latin typeface="Calibri" charset="0"/>
                         <a:ea typeface="Calibri" charset="0"/>
                         <a:cs typeface="Calibri" charset="0"/>
@@ -1595,10 +2559,12 @@
                       <a:tailEnd type="none" w="med" len="med"/>
                     </a:lnB>
                     <a:solidFill>
-                      <a:srgbClr val="1B2A4A"/>
+                      <a:srgbClr val="E9C46A"/>
                     </a:solidFill>
                   </a:tcPr>
                 </a:tc>
+              </a:tr>
+              <a:tr h="457200">
                 <a:tc>
                   <a:txBody>
                     <a:bodyPr/>
@@ -1608,79 +2574,9 @@
                         <a:buNone/>
                       </a:pPr>
                       <a:r>
-                        <a:rPr lang="en-US" sz="1200" b="1" dirty="0">
+                        <a:rPr lang="en-US" sz="1400" b="1" dirty="0">
                           <a:solidFill>
-                            <a:srgbClr val="FFFFFF"/>
-                          </a:solidFill>
-                          <a:latin typeface="Calibri" pitchFamily="34" charset="0"/>
-                          <a:ea typeface="Calibri" pitchFamily="34" charset="-122"/>
-                          <a:cs typeface="Calibri" pitchFamily="34" charset="-120"/>
-                        </a:rPr>
-                        <a:t>Example</a:t>
-                      </a:r>
-                      <a:endParaRPr lang="en-US" sz="1200" dirty="0">
-                        <a:latin typeface="Calibri" charset="0"/>
-                        <a:ea typeface="Calibri" charset="0"/>
-                        <a:cs typeface="Calibri" charset="0"/>
-                      </a:endParaRPr>
-                    </a:p>
-                  </a:txBody>
-                  <a:tcPr marL="91440" marR="91440" marT="45720" marB="45720">
-                    <a:lnL w="6350" cap="flat" cmpd="sng" algn="ctr">
-                      <a:solidFill>
-                        <a:srgbClr val="E5E2DC"/>
-                      </a:solidFill>
-                      <a:prstDash val="solid"/>
-                      <a:round/>
-                      <a:headEnd type="none" w="med" len="med"/>
-                      <a:tailEnd type="none" w="med" len="med"/>
-                    </a:lnL>
-                    <a:lnR w="6350" cap="flat" cmpd="sng" algn="ctr">
-                      <a:solidFill>
-                        <a:srgbClr val="E5E2DC"/>
-                      </a:solidFill>
-                      <a:prstDash val="solid"/>
-                      <a:round/>
-                      <a:headEnd type="none" w="med" len="med"/>
-                      <a:tailEnd type="none" w="med" len="med"/>
-                    </a:lnR>
-                    <a:lnT w="6350" cap="flat" cmpd="sng" algn="ctr">
-                      <a:solidFill>
-                        <a:srgbClr val="E5E2DC"/>
-                      </a:solidFill>
-                      <a:prstDash val="solid"/>
-                      <a:round/>
-                      <a:headEnd type="none" w="med" len="med"/>
-                      <a:tailEnd type="none" w="med" len="med"/>
-                    </a:lnT>
-                    <a:lnB w="6350" cap="flat" cmpd="sng" algn="ctr">
-                      <a:solidFill>
-                        <a:srgbClr val="E5E2DC"/>
-                      </a:solidFill>
-                      <a:prstDash val="solid"/>
-                      <a:round/>
-                      <a:headEnd type="none" w="med" len="med"/>
-                      <a:tailEnd type="none" w="med" len="med"/>
-                    </a:lnB>
-                    <a:solidFill>
-                      <a:srgbClr val="1B2A4A"/>
-                    </a:solidFill>
-                  </a:tcPr>
-                </a:tc>
-              </a:tr>
-              <a:tr h="502920">
-                <a:tc>
-                  <a:txBody>
-                    <a:bodyPr/>
-                    <a:lstStyle/>
-                    <a:p>
-                      <a:pPr indent="0" marL="0">
-                        <a:buNone/>
-                      </a:pPr>
-                      <a:r>
-                        <a:rPr lang="en-US" sz="1200" dirty="0">
-                          <a:solidFill>
-                            <a:srgbClr val="3D3A36"/>
+                            <a:srgbClr val="1B2A4A"/>
                           </a:solidFill>
                           <a:latin typeface="Calibri" pitchFamily="34" charset="0"/>
                           <a:ea typeface="Calibri" pitchFamily="34" charset="-122"/>
@@ -1688,7 +2584,7 @@
                         </a:rPr>
                         <a:t>Producer</a:t>
                       </a:r>
-                      <a:endParaRPr lang="en-US" sz="1200" dirty="0">
+                      <a:endParaRPr lang="en-US" sz="1400" dirty="0">
                         <a:latin typeface="Calibri" charset="0"/>
                         <a:ea typeface="Calibri" charset="0"/>
                         <a:cs typeface="Calibri" charset="0"/>
@@ -1743,7 +2639,7 @@
                         <a:buNone/>
                       </a:pPr>
                       <a:r>
-                        <a:rPr lang="en-US" sz="1200" dirty="0">
+                        <a:rPr lang="en-US" sz="1400" dirty="0">
                           <a:solidFill>
                             <a:srgbClr val="3D3A36"/>
                           </a:solidFill>
@@ -1751,9 +2647,76 @@
                           <a:ea typeface="Calibri" pitchFamily="34" charset="-122"/>
                           <a:cs typeface="Calibri" pitchFamily="34" charset="-120"/>
                         </a:rPr>
-                        <a:t>Makes own food (photosynthesis)</a:t>
+                        <a:t>Makes own food by photosynthesis.</a:t>
                       </a:r>
-                      <a:endParaRPr lang="en-US" sz="1200" dirty="0">
+                      <a:endParaRPr lang="en-US" sz="1400" dirty="0">
+                        <a:latin typeface="Calibri" charset="0"/>
+                        <a:ea typeface="Calibri" charset="0"/>
+                        <a:cs typeface="Calibri" charset="0"/>
+                      </a:endParaRPr>
+                    </a:p>
+                  </a:txBody>
+                  <a:tcPr marL="91440" marR="91440" marT="45720" marB="45720">
+                    <a:lnL w="6350" cap="flat" cmpd="sng" algn="ctr">
+                      <a:solidFill>
+                        <a:srgbClr val="E5E2DC"/>
+                      </a:solidFill>
+                      <a:prstDash val="solid"/>
+                      <a:round/>
+                      <a:headEnd type="none" w="med" len="med"/>
+                      <a:tailEnd type="none" w="med" len="med"/>
+                    </a:lnL>
+                    <a:lnR w="6350" cap="flat" cmpd="sng" algn="ctr">
+                      <a:solidFill>
+                        <a:srgbClr val="E5E2DC"/>
+                      </a:solidFill>
+                      <a:prstDash val="solid"/>
+                      <a:round/>
+                      <a:headEnd type="none" w="med" len="med"/>
+                      <a:tailEnd type="none" w="med" len="med"/>
+                    </a:lnR>
+                    <a:lnT w="6350" cap="flat" cmpd="sng" algn="ctr">
+                      <a:solidFill>
+                        <a:srgbClr val="E5E2DC"/>
+                      </a:solidFill>
+                      <a:prstDash val="solid"/>
+                      <a:round/>
+                      <a:headEnd type="none" w="med" len="med"/>
+                      <a:tailEnd type="none" w="med" len="med"/>
+                    </a:lnT>
+                    <a:lnB w="6350" cap="flat" cmpd="sng" algn="ctr">
+                      <a:solidFill>
+                        <a:srgbClr val="E5E2DC"/>
+                      </a:solidFill>
+                      <a:prstDash val="solid"/>
+                      <a:round/>
+                      <a:headEnd type="none" w="med" len="med"/>
+                      <a:tailEnd type="none" w="med" len="med"/>
+                    </a:lnB>
+                  </a:tcPr>
+                </a:tc>
+              </a:tr>
+              <a:tr h="457200">
+                <a:tc>
+                  <a:txBody>
+                    <a:bodyPr/>
+                    <a:lstStyle/>
+                    <a:p>
+                      <a:pPr indent="0" marL="0">
+                        <a:buNone/>
+                      </a:pPr>
+                      <a:r>
+                        <a:rPr lang="en-US" sz="1400" b="1" dirty="0">
+                          <a:solidFill>
+                            <a:srgbClr val="1B2A4A"/>
+                          </a:solidFill>
+                          <a:latin typeface="Calibri" pitchFamily="34" charset="0"/>
+                          <a:ea typeface="Calibri" pitchFamily="34" charset="-122"/>
+                          <a:cs typeface="Calibri" pitchFamily="34" charset="-120"/>
+                        </a:rPr>
+                        <a:t>Primary consumer</a:t>
+                      </a:r>
+                      <a:endParaRPr lang="en-US" sz="1400" dirty="0">
                         <a:latin typeface="Calibri" charset="0"/>
                         <a:ea typeface="Calibri" charset="0"/>
                         <a:cs typeface="Calibri" charset="0"/>
@@ -1808,7 +2771,7 @@
                         <a:buNone/>
                       </a:pPr>
                       <a:r>
-                        <a:rPr lang="en-US" sz="1200" dirty="0">
+                        <a:rPr lang="en-US" sz="1400" dirty="0">
                           <a:solidFill>
                             <a:srgbClr val="3D3A36"/>
                           </a:solidFill>
@@ -1816,9 +2779,9 @@
                           <a:ea typeface="Calibri" pitchFamily="34" charset="-122"/>
                           <a:cs typeface="Calibri" pitchFamily="34" charset="-120"/>
                         </a:rPr>
-                        <a:t>Grass, algae, trees</a:t>
+                        <a:t>Eats producers (herbivore).</a:t>
                       </a:r>
-                      <a:endParaRPr lang="en-US" sz="1200" dirty="0">
+                      <a:endParaRPr lang="en-US" sz="1400" dirty="0">
                         <a:latin typeface="Calibri" charset="0"/>
                         <a:ea typeface="Calibri" charset="0"/>
                         <a:cs typeface="Calibri" charset="0"/>
@@ -1865,7 +2828,7 @@
                   </a:tcPr>
                 </a:tc>
               </a:tr>
-              <a:tr h="502920">
+              <a:tr h="457200">
                 <a:tc>
                   <a:txBody>
                     <a:bodyPr/>
@@ -1875,17 +2838,17 @@
                         <a:buNone/>
                       </a:pPr>
                       <a:r>
-                        <a:rPr lang="en-US" sz="1200" dirty="0">
+                        <a:rPr lang="en-US" sz="1400" b="1" dirty="0">
                           <a:solidFill>
-                            <a:srgbClr val="3D3A36"/>
+                            <a:srgbClr val="1B2A4A"/>
                           </a:solidFill>
                           <a:latin typeface="Calibri" pitchFamily="34" charset="0"/>
                           <a:ea typeface="Calibri" pitchFamily="34" charset="-122"/>
                           <a:cs typeface="Calibri" pitchFamily="34" charset="-120"/>
                         </a:rPr>
-                        <a:t>Primary consumer</a:t>
+                        <a:t>Secondary consumer</a:t>
                       </a:r>
-                      <a:endParaRPr lang="en-US" sz="1200" dirty="0">
+                      <a:endParaRPr lang="en-US" sz="1400" dirty="0">
                         <a:latin typeface="Calibri" charset="0"/>
                         <a:ea typeface="Calibri" charset="0"/>
                         <a:cs typeface="Calibri" charset="0"/>
@@ -1940,7 +2903,7 @@
                         <a:buNone/>
                       </a:pPr>
                       <a:r>
-                        <a:rPr lang="en-US" sz="1200" dirty="0">
+                        <a:rPr lang="en-US" sz="1400" dirty="0">
                           <a:solidFill>
                             <a:srgbClr val="3D3A36"/>
                           </a:solidFill>
@@ -1948,9 +2911,76 @@
                           <a:ea typeface="Calibri" pitchFamily="34" charset="-122"/>
                           <a:cs typeface="Calibri" pitchFamily="34" charset="-120"/>
                         </a:rPr>
-                        <a:t>Eats producers (herbivore)</a:t>
+                        <a:t>Eats primary consumers.</a:t>
                       </a:r>
-                      <a:endParaRPr lang="en-US" sz="1200" dirty="0">
+                      <a:endParaRPr lang="en-US" sz="1400" dirty="0">
+                        <a:latin typeface="Calibri" charset="0"/>
+                        <a:ea typeface="Calibri" charset="0"/>
+                        <a:cs typeface="Calibri" charset="0"/>
+                      </a:endParaRPr>
+                    </a:p>
+                  </a:txBody>
+                  <a:tcPr marL="91440" marR="91440" marT="45720" marB="45720">
+                    <a:lnL w="6350" cap="flat" cmpd="sng" algn="ctr">
+                      <a:solidFill>
+                        <a:srgbClr val="E5E2DC"/>
+                      </a:solidFill>
+                      <a:prstDash val="solid"/>
+                      <a:round/>
+                      <a:headEnd type="none" w="med" len="med"/>
+                      <a:tailEnd type="none" w="med" len="med"/>
+                    </a:lnL>
+                    <a:lnR w="6350" cap="flat" cmpd="sng" algn="ctr">
+                      <a:solidFill>
+                        <a:srgbClr val="E5E2DC"/>
+                      </a:solidFill>
+                      <a:prstDash val="solid"/>
+                      <a:round/>
+                      <a:headEnd type="none" w="med" len="med"/>
+                      <a:tailEnd type="none" w="med" len="med"/>
+                    </a:lnR>
+                    <a:lnT w="6350" cap="flat" cmpd="sng" algn="ctr">
+                      <a:solidFill>
+                        <a:srgbClr val="E5E2DC"/>
+                      </a:solidFill>
+                      <a:prstDash val="solid"/>
+                      <a:round/>
+                      <a:headEnd type="none" w="med" len="med"/>
+                      <a:tailEnd type="none" w="med" len="med"/>
+                    </a:lnT>
+                    <a:lnB w="6350" cap="flat" cmpd="sng" algn="ctr">
+                      <a:solidFill>
+                        <a:srgbClr val="E5E2DC"/>
+                      </a:solidFill>
+                      <a:prstDash val="solid"/>
+                      <a:round/>
+                      <a:headEnd type="none" w="med" len="med"/>
+                      <a:tailEnd type="none" w="med" len="med"/>
+                    </a:lnB>
+                  </a:tcPr>
+                </a:tc>
+              </a:tr>
+              <a:tr h="457200">
+                <a:tc>
+                  <a:txBody>
+                    <a:bodyPr/>
+                    <a:lstStyle/>
+                    <a:p>
+                      <a:pPr indent="0" marL="0">
+                        <a:buNone/>
+                      </a:pPr>
+                      <a:r>
+                        <a:rPr lang="en-US" sz="1400" b="1" dirty="0">
+                          <a:solidFill>
+                            <a:srgbClr val="1B2A4A"/>
+                          </a:solidFill>
+                          <a:latin typeface="Calibri" pitchFamily="34" charset="0"/>
+                          <a:ea typeface="Calibri" pitchFamily="34" charset="-122"/>
+                          <a:cs typeface="Calibri" pitchFamily="34" charset="-120"/>
+                        </a:rPr>
+                        <a:t>Tertiary consumer</a:t>
+                      </a:r>
+                      <a:endParaRPr lang="en-US" sz="1400" dirty="0">
                         <a:latin typeface="Calibri" charset="0"/>
                         <a:ea typeface="Calibri" charset="0"/>
                         <a:cs typeface="Calibri" charset="0"/>
@@ -2005,7 +3035,7 @@
                         <a:buNone/>
                       </a:pPr>
                       <a:r>
-                        <a:rPr lang="en-US" sz="1200" dirty="0">
+                        <a:rPr lang="en-US" sz="1400" dirty="0">
                           <a:solidFill>
                             <a:srgbClr val="3D3A36"/>
                           </a:solidFill>
@@ -2013,9 +3043,9 @@
                           <a:ea typeface="Calibri" pitchFamily="34" charset="-122"/>
                           <a:cs typeface="Calibri" pitchFamily="34" charset="-120"/>
                         </a:rPr>
-                        <a:t>Rabbit, deer</a:t>
+                        <a:t>Top predator.</a:t>
                       </a:r>
-                      <a:endParaRPr lang="en-US" sz="1200" dirty="0">
+                      <a:endParaRPr lang="en-US" sz="1400" dirty="0">
                         <a:latin typeface="Calibri" charset="0"/>
                         <a:ea typeface="Calibri" charset="0"/>
                         <a:cs typeface="Calibri" charset="0"/>
@@ -2062,7 +3092,7 @@
                   </a:tcPr>
                 </a:tc>
               </a:tr>
-              <a:tr h="502920">
+              <a:tr h="457200">
                 <a:tc>
                   <a:txBody>
                     <a:bodyPr/>
@@ -2072,17 +3102,17 @@
                         <a:buNone/>
                       </a:pPr>
                       <a:r>
-                        <a:rPr lang="en-US" sz="1200" dirty="0">
+                        <a:rPr lang="en-US" sz="1400" b="1" dirty="0">
                           <a:solidFill>
-                            <a:srgbClr val="3D3A36"/>
+                            <a:srgbClr val="1B2A4A"/>
                           </a:solidFill>
                           <a:latin typeface="Calibri" pitchFamily="34" charset="0"/>
                           <a:ea typeface="Calibri" pitchFamily="34" charset="-122"/>
                           <a:cs typeface="Calibri" pitchFamily="34" charset="-120"/>
                         </a:rPr>
-                        <a:t>Secondary consumer</a:t>
+                        <a:t>Decomposer</a:t>
                       </a:r>
-                      <a:endParaRPr lang="en-US" sz="1200" dirty="0">
+                      <a:endParaRPr lang="en-US" sz="1400" dirty="0">
                         <a:latin typeface="Calibri" charset="0"/>
                         <a:ea typeface="Calibri" charset="0"/>
                         <a:cs typeface="Calibri" charset="0"/>
@@ -2137,7 +3167,7 @@
                         <a:buNone/>
                       </a:pPr>
                       <a:r>
-                        <a:rPr lang="en-US" sz="1200" dirty="0">
+                        <a:rPr lang="en-US" sz="1400" dirty="0">
                           <a:solidFill>
                             <a:srgbClr val="3D3A36"/>
                           </a:solidFill>
@@ -2145,468 +3175,9 @@
                           <a:ea typeface="Calibri" pitchFamily="34" charset="-122"/>
                           <a:cs typeface="Calibri" pitchFamily="34" charset="-120"/>
                         </a:rPr>
-                        <a:t>Eats primary consumers</a:t>
+                        <a:t>Breaks down dead organisms.</a:t>
                       </a:r>
-                      <a:endParaRPr lang="en-US" sz="1200" dirty="0">
-                        <a:latin typeface="Calibri" charset="0"/>
-                        <a:ea typeface="Calibri" charset="0"/>
-                        <a:cs typeface="Calibri" charset="0"/>
-                      </a:endParaRPr>
-                    </a:p>
-                  </a:txBody>
-                  <a:tcPr marL="91440" marR="91440" marT="45720" marB="45720">
-                    <a:lnL w="6350" cap="flat" cmpd="sng" algn="ctr">
-                      <a:solidFill>
-                        <a:srgbClr val="E5E2DC"/>
-                      </a:solidFill>
-                      <a:prstDash val="solid"/>
-                      <a:round/>
-                      <a:headEnd type="none" w="med" len="med"/>
-                      <a:tailEnd type="none" w="med" len="med"/>
-                    </a:lnL>
-                    <a:lnR w="6350" cap="flat" cmpd="sng" algn="ctr">
-                      <a:solidFill>
-                        <a:srgbClr val="E5E2DC"/>
-                      </a:solidFill>
-                      <a:prstDash val="solid"/>
-                      <a:round/>
-                      <a:headEnd type="none" w="med" len="med"/>
-                      <a:tailEnd type="none" w="med" len="med"/>
-                    </a:lnR>
-                    <a:lnT w="6350" cap="flat" cmpd="sng" algn="ctr">
-                      <a:solidFill>
-                        <a:srgbClr val="E5E2DC"/>
-                      </a:solidFill>
-                      <a:prstDash val="solid"/>
-                      <a:round/>
-                      <a:headEnd type="none" w="med" len="med"/>
-                      <a:tailEnd type="none" w="med" len="med"/>
-                    </a:lnT>
-                    <a:lnB w="6350" cap="flat" cmpd="sng" algn="ctr">
-                      <a:solidFill>
-                        <a:srgbClr val="E5E2DC"/>
-                      </a:solidFill>
-                      <a:prstDash val="solid"/>
-                      <a:round/>
-                      <a:headEnd type="none" w="med" len="med"/>
-                      <a:tailEnd type="none" w="med" len="med"/>
-                    </a:lnB>
-                  </a:tcPr>
-                </a:tc>
-                <a:tc>
-                  <a:txBody>
-                    <a:bodyPr/>
-                    <a:lstStyle/>
-                    <a:p>
-                      <a:pPr indent="0" marL="0">
-                        <a:buNone/>
-                      </a:pPr>
-                      <a:r>
-                        <a:rPr lang="en-US" sz="1200" dirty="0">
-                          <a:solidFill>
-                            <a:srgbClr val="3D3A36"/>
-                          </a:solidFill>
-                          <a:latin typeface="Calibri" pitchFamily="34" charset="0"/>
-                          <a:ea typeface="Calibri" pitchFamily="34" charset="-122"/>
-                          <a:cs typeface="Calibri" pitchFamily="34" charset="-120"/>
-                        </a:rPr>
-                        <a:t>Snake, frog</a:t>
-                      </a:r>
-                      <a:endParaRPr lang="en-US" sz="1200" dirty="0">
-                        <a:latin typeface="Calibri" charset="0"/>
-                        <a:ea typeface="Calibri" charset="0"/>
-                        <a:cs typeface="Calibri" charset="0"/>
-                      </a:endParaRPr>
-                    </a:p>
-                  </a:txBody>
-                  <a:tcPr marL="91440" marR="91440" marT="45720" marB="45720">
-                    <a:lnL w="6350" cap="flat" cmpd="sng" algn="ctr">
-                      <a:solidFill>
-                        <a:srgbClr val="E5E2DC"/>
-                      </a:solidFill>
-                      <a:prstDash val="solid"/>
-                      <a:round/>
-                      <a:headEnd type="none" w="med" len="med"/>
-                      <a:tailEnd type="none" w="med" len="med"/>
-                    </a:lnL>
-                    <a:lnR w="6350" cap="flat" cmpd="sng" algn="ctr">
-                      <a:solidFill>
-                        <a:srgbClr val="E5E2DC"/>
-                      </a:solidFill>
-                      <a:prstDash val="solid"/>
-                      <a:round/>
-                      <a:headEnd type="none" w="med" len="med"/>
-                      <a:tailEnd type="none" w="med" len="med"/>
-                    </a:lnR>
-                    <a:lnT w="6350" cap="flat" cmpd="sng" algn="ctr">
-                      <a:solidFill>
-                        <a:srgbClr val="E5E2DC"/>
-                      </a:solidFill>
-                      <a:prstDash val="solid"/>
-                      <a:round/>
-                      <a:headEnd type="none" w="med" len="med"/>
-                      <a:tailEnd type="none" w="med" len="med"/>
-                    </a:lnT>
-                    <a:lnB w="6350" cap="flat" cmpd="sng" algn="ctr">
-                      <a:solidFill>
-                        <a:srgbClr val="E5E2DC"/>
-                      </a:solidFill>
-                      <a:prstDash val="solid"/>
-                      <a:round/>
-                      <a:headEnd type="none" w="med" len="med"/>
-                      <a:tailEnd type="none" w="med" len="med"/>
-                    </a:lnB>
-                  </a:tcPr>
-                </a:tc>
-              </a:tr>
-              <a:tr h="502920">
-                <a:tc>
-                  <a:txBody>
-                    <a:bodyPr/>
-                    <a:lstStyle/>
-                    <a:p>
-                      <a:pPr indent="0" marL="0">
-                        <a:buNone/>
-                      </a:pPr>
-                      <a:r>
-                        <a:rPr lang="en-US" sz="1200" dirty="0">
-                          <a:solidFill>
-                            <a:srgbClr val="3D3A36"/>
-                          </a:solidFill>
-                          <a:latin typeface="Calibri" pitchFamily="34" charset="0"/>
-                          <a:ea typeface="Calibri" pitchFamily="34" charset="-122"/>
-                          <a:cs typeface="Calibri" pitchFamily="34" charset="-120"/>
-                        </a:rPr>
-                        <a:t>Tertiary consumer</a:t>
-                      </a:r>
-                      <a:endParaRPr lang="en-US" sz="1200" dirty="0">
-                        <a:latin typeface="Calibri" charset="0"/>
-                        <a:ea typeface="Calibri" charset="0"/>
-                        <a:cs typeface="Calibri" charset="0"/>
-                      </a:endParaRPr>
-                    </a:p>
-                  </a:txBody>
-                  <a:tcPr marL="91440" marR="91440" marT="45720" marB="45720">
-                    <a:lnL w="6350" cap="flat" cmpd="sng" algn="ctr">
-                      <a:solidFill>
-                        <a:srgbClr val="E5E2DC"/>
-                      </a:solidFill>
-                      <a:prstDash val="solid"/>
-                      <a:round/>
-                      <a:headEnd type="none" w="med" len="med"/>
-                      <a:tailEnd type="none" w="med" len="med"/>
-                    </a:lnL>
-                    <a:lnR w="6350" cap="flat" cmpd="sng" algn="ctr">
-                      <a:solidFill>
-                        <a:srgbClr val="E5E2DC"/>
-                      </a:solidFill>
-                      <a:prstDash val="solid"/>
-                      <a:round/>
-                      <a:headEnd type="none" w="med" len="med"/>
-                      <a:tailEnd type="none" w="med" len="med"/>
-                    </a:lnR>
-                    <a:lnT w="6350" cap="flat" cmpd="sng" algn="ctr">
-                      <a:solidFill>
-                        <a:srgbClr val="E5E2DC"/>
-                      </a:solidFill>
-                      <a:prstDash val="solid"/>
-                      <a:round/>
-                      <a:headEnd type="none" w="med" len="med"/>
-                      <a:tailEnd type="none" w="med" len="med"/>
-                    </a:lnT>
-                    <a:lnB w="6350" cap="flat" cmpd="sng" algn="ctr">
-                      <a:solidFill>
-                        <a:srgbClr val="E5E2DC"/>
-                      </a:solidFill>
-                      <a:prstDash val="solid"/>
-                      <a:round/>
-                      <a:headEnd type="none" w="med" len="med"/>
-                      <a:tailEnd type="none" w="med" len="med"/>
-                    </a:lnB>
-                  </a:tcPr>
-                </a:tc>
-                <a:tc>
-                  <a:txBody>
-                    <a:bodyPr/>
-                    <a:lstStyle/>
-                    <a:p>
-                      <a:pPr indent="0" marL="0">
-                        <a:buNone/>
-                      </a:pPr>
-                      <a:r>
-                        <a:rPr lang="en-US" sz="1200" dirty="0">
-                          <a:solidFill>
-                            <a:srgbClr val="3D3A36"/>
-                          </a:solidFill>
-                          <a:latin typeface="Calibri" pitchFamily="34" charset="0"/>
-                          <a:ea typeface="Calibri" pitchFamily="34" charset="-122"/>
-                          <a:cs typeface="Calibri" pitchFamily="34" charset="-120"/>
-                        </a:rPr>
-                        <a:t>Eats secondary consumers</a:t>
-                      </a:r>
-                      <a:endParaRPr lang="en-US" sz="1200" dirty="0">
-                        <a:latin typeface="Calibri" charset="0"/>
-                        <a:ea typeface="Calibri" charset="0"/>
-                        <a:cs typeface="Calibri" charset="0"/>
-                      </a:endParaRPr>
-                    </a:p>
-                  </a:txBody>
-                  <a:tcPr marL="91440" marR="91440" marT="45720" marB="45720">
-                    <a:lnL w="6350" cap="flat" cmpd="sng" algn="ctr">
-                      <a:solidFill>
-                        <a:srgbClr val="E5E2DC"/>
-                      </a:solidFill>
-                      <a:prstDash val="solid"/>
-                      <a:round/>
-                      <a:headEnd type="none" w="med" len="med"/>
-                      <a:tailEnd type="none" w="med" len="med"/>
-                    </a:lnL>
-                    <a:lnR w="6350" cap="flat" cmpd="sng" algn="ctr">
-                      <a:solidFill>
-                        <a:srgbClr val="E5E2DC"/>
-                      </a:solidFill>
-                      <a:prstDash val="solid"/>
-                      <a:round/>
-                      <a:headEnd type="none" w="med" len="med"/>
-                      <a:tailEnd type="none" w="med" len="med"/>
-                    </a:lnR>
-                    <a:lnT w="6350" cap="flat" cmpd="sng" algn="ctr">
-                      <a:solidFill>
-                        <a:srgbClr val="E5E2DC"/>
-                      </a:solidFill>
-                      <a:prstDash val="solid"/>
-                      <a:round/>
-                      <a:headEnd type="none" w="med" len="med"/>
-                      <a:tailEnd type="none" w="med" len="med"/>
-                    </a:lnT>
-                    <a:lnB w="6350" cap="flat" cmpd="sng" algn="ctr">
-                      <a:solidFill>
-                        <a:srgbClr val="E5E2DC"/>
-                      </a:solidFill>
-                      <a:prstDash val="solid"/>
-                      <a:round/>
-                      <a:headEnd type="none" w="med" len="med"/>
-                      <a:tailEnd type="none" w="med" len="med"/>
-                    </a:lnB>
-                  </a:tcPr>
-                </a:tc>
-                <a:tc>
-                  <a:txBody>
-                    <a:bodyPr/>
-                    <a:lstStyle/>
-                    <a:p>
-                      <a:pPr indent="0" marL="0">
-                        <a:buNone/>
-                      </a:pPr>
-                      <a:r>
-                        <a:rPr lang="en-US" sz="1200" dirty="0">
-                          <a:solidFill>
-                            <a:srgbClr val="3D3A36"/>
-                          </a:solidFill>
-                          <a:latin typeface="Calibri" pitchFamily="34" charset="0"/>
-                          <a:ea typeface="Calibri" pitchFamily="34" charset="-122"/>
-                          <a:cs typeface="Calibri" pitchFamily="34" charset="-120"/>
-                        </a:rPr>
-                        <a:t>Eagle, fox</a:t>
-                      </a:r>
-                      <a:endParaRPr lang="en-US" sz="1200" dirty="0">
-                        <a:latin typeface="Calibri" charset="0"/>
-                        <a:ea typeface="Calibri" charset="0"/>
-                        <a:cs typeface="Calibri" charset="0"/>
-                      </a:endParaRPr>
-                    </a:p>
-                  </a:txBody>
-                  <a:tcPr marL="91440" marR="91440" marT="45720" marB="45720">
-                    <a:lnL w="6350" cap="flat" cmpd="sng" algn="ctr">
-                      <a:solidFill>
-                        <a:srgbClr val="E5E2DC"/>
-                      </a:solidFill>
-                      <a:prstDash val="solid"/>
-                      <a:round/>
-                      <a:headEnd type="none" w="med" len="med"/>
-                      <a:tailEnd type="none" w="med" len="med"/>
-                    </a:lnL>
-                    <a:lnR w="6350" cap="flat" cmpd="sng" algn="ctr">
-                      <a:solidFill>
-                        <a:srgbClr val="E5E2DC"/>
-                      </a:solidFill>
-                      <a:prstDash val="solid"/>
-                      <a:round/>
-                      <a:headEnd type="none" w="med" len="med"/>
-                      <a:tailEnd type="none" w="med" len="med"/>
-                    </a:lnR>
-                    <a:lnT w="6350" cap="flat" cmpd="sng" algn="ctr">
-                      <a:solidFill>
-                        <a:srgbClr val="E5E2DC"/>
-                      </a:solidFill>
-                      <a:prstDash val="solid"/>
-                      <a:round/>
-                      <a:headEnd type="none" w="med" len="med"/>
-                      <a:tailEnd type="none" w="med" len="med"/>
-                    </a:lnT>
-                    <a:lnB w="6350" cap="flat" cmpd="sng" algn="ctr">
-                      <a:solidFill>
-                        <a:srgbClr val="E5E2DC"/>
-                      </a:solidFill>
-                      <a:prstDash val="solid"/>
-                      <a:round/>
-                      <a:headEnd type="none" w="med" len="med"/>
-                      <a:tailEnd type="none" w="med" len="med"/>
-                    </a:lnB>
-                  </a:tcPr>
-                </a:tc>
-              </a:tr>
-              <a:tr h="502920">
-                <a:tc>
-                  <a:txBody>
-                    <a:bodyPr/>
-                    <a:lstStyle/>
-                    <a:p>
-                      <a:pPr indent="0" marL="0">
-                        <a:buNone/>
-                      </a:pPr>
-                      <a:r>
-                        <a:rPr lang="en-US" sz="1200" dirty="0">
-                          <a:solidFill>
-                            <a:srgbClr val="3D3A36"/>
-                          </a:solidFill>
-                          <a:latin typeface="Calibri" pitchFamily="34" charset="0"/>
-                          <a:ea typeface="Calibri" pitchFamily="34" charset="-122"/>
-                          <a:cs typeface="Calibri" pitchFamily="34" charset="-120"/>
-                        </a:rPr>
-                        <a:t>Decomposer</a:t>
-                      </a:r>
-                      <a:endParaRPr lang="en-US" sz="1200" dirty="0">
-                        <a:latin typeface="Calibri" charset="0"/>
-                        <a:ea typeface="Calibri" charset="0"/>
-                        <a:cs typeface="Calibri" charset="0"/>
-                      </a:endParaRPr>
-                    </a:p>
-                  </a:txBody>
-                  <a:tcPr marL="91440" marR="91440" marT="45720" marB="45720">
-                    <a:lnL w="6350" cap="flat" cmpd="sng" algn="ctr">
-                      <a:solidFill>
-                        <a:srgbClr val="E5E2DC"/>
-                      </a:solidFill>
-                      <a:prstDash val="solid"/>
-                      <a:round/>
-                      <a:headEnd type="none" w="med" len="med"/>
-                      <a:tailEnd type="none" w="med" len="med"/>
-                    </a:lnL>
-                    <a:lnR w="6350" cap="flat" cmpd="sng" algn="ctr">
-                      <a:solidFill>
-                        <a:srgbClr val="E5E2DC"/>
-                      </a:solidFill>
-                      <a:prstDash val="solid"/>
-                      <a:round/>
-                      <a:headEnd type="none" w="med" len="med"/>
-                      <a:tailEnd type="none" w="med" len="med"/>
-                    </a:lnR>
-                    <a:lnT w="6350" cap="flat" cmpd="sng" algn="ctr">
-                      <a:solidFill>
-                        <a:srgbClr val="E5E2DC"/>
-                      </a:solidFill>
-                      <a:prstDash val="solid"/>
-                      <a:round/>
-                      <a:headEnd type="none" w="med" len="med"/>
-                      <a:tailEnd type="none" w="med" len="med"/>
-                    </a:lnT>
-                    <a:lnB w="6350" cap="flat" cmpd="sng" algn="ctr">
-                      <a:solidFill>
-                        <a:srgbClr val="E5E2DC"/>
-                      </a:solidFill>
-                      <a:prstDash val="solid"/>
-                      <a:round/>
-                      <a:headEnd type="none" w="med" len="med"/>
-                      <a:tailEnd type="none" w="med" len="med"/>
-                    </a:lnB>
-                  </a:tcPr>
-                </a:tc>
-                <a:tc>
-                  <a:txBody>
-                    <a:bodyPr/>
-                    <a:lstStyle/>
-                    <a:p>
-                      <a:pPr indent="0" marL="0">
-                        <a:buNone/>
-                      </a:pPr>
-                      <a:r>
-                        <a:rPr lang="en-US" sz="1200" dirty="0">
-                          <a:solidFill>
-                            <a:srgbClr val="3D3A36"/>
-                          </a:solidFill>
-                          <a:latin typeface="Calibri" pitchFamily="34" charset="0"/>
-                          <a:ea typeface="Calibri" pitchFamily="34" charset="-122"/>
-                          <a:cs typeface="Calibri" pitchFamily="34" charset="-120"/>
-                        </a:rPr>
-                        <a:t>Breaks down dead organisms</a:t>
-                      </a:r>
-                      <a:endParaRPr lang="en-US" sz="1200" dirty="0">
-                        <a:latin typeface="Calibri" charset="0"/>
-                        <a:ea typeface="Calibri" charset="0"/>
-                        <a:cs typeface="Calibri" charset="0"/>
-                      </a:endParaRPr>
-                    </a:p>
-                  </a:txBody>
-                  <a:tcPr marL="91440" marR="91440" marT="45720" marB="45720">
-                    <a:lnL w="6350" cap="flat" cmpd="sng" algn="ctr">
-                      <a:solidFill>
-                        <a:srgbClr val="E5E2DC"/>
-                      </a:solidFill>
-                      <a:prstDash val="solid"/>
-                      <a:round/>
-                      <a:headEnd type="none" w="med" len="med"/>
-                      <a:tailEnd type="none" w="med" len="med"/>
-                    </a:lnL>
-                    <a:lnR w="6350" cap="flat" cmpd="sng" algn="ctr">
-                      <a:solidFill>
-                        <a:srgbClr val="E5E2DC"/>
-                      </a:solidFill>
-                      <a:prstDash val="solid"/>
-                      <a:round/>
-                      <a:headEnd type="none" w="med" len="med"/>
-                      <a:tailEnd type="none" w="med" len="med"/>
-                    </a:lnR>
-                    <a:lnT w="6350" cap="flat" cmpd="sng" algn="ctr">
-                      <a:solidFill>
-                        <a:srgbClr val="E5E2DC"/>
-                      </a:solidFill>
-                      <a:prstDash val="solid"/>
-                      <a:round/>
-                      <a:headEnd type="none" w="med" len="med"/>
-                      <a:tailEnd type="none" w="med" len="med"/>
-                    </a:lnT>
-                    <a:lnB w="6350" cap="flat" cmpd="sng" algn="ctr">
-                      <a:solidFill>
-                        <a:srgbClr val="E5E2DC"/>
-                      </a:solidFill>
-                      <a:prstDash val="solid"/>
-                      <a:round/>
-                      <a:headEnd type="none" w="med" len="med"/>
-                      <a:tailEnd type="none" w="med" len="med"/>
-                    </a:lnB>
-                  </a:tcPr>
-                </a:tc>
-                <a:tc>
-                  <a:txBody>
-                    <a:bodyPr/>
-                    <a:lstStyle/>
-                    <a:p>
-                      <a:pPr indent="0" marL="0">
-                        <a:buNone/>
-                      </a:pPr>
-                      <a:r>
-                        <a:rPr lang="en-US" sz="1200" dirty="0">
-                          <a:solidFill>
-                            <a:srgbClr val="3D3A36"/>
-                          </a:solidFill>
-                          <a:latin typeface="Calibri" pitchFamily="34" charset="0"/>
-                          <a:ea typeface="Calibri" pitchFamily="34" charset="-122"/>
-                          <a:cs typeface="Calibri" pitchFamily="34" charset="-120"/>
-                        </a:rPr>
-                        <a:t>Fungi, bacteria</a:t>
-                      </a:r>
-                      <a:endParaRPr lang="en-US" sz="1200" dirty="0">
+                      <a:endParaRPr lang="en-US" sz="1400" dirty="0">
                         <a:latin typeface="Calibri" charset="0"/>
                         <a:ea typeface="Calibri" charset="0"/>
                         <a:cs typeface="Calibri" charset="0"/>
@@ -2665,9 +3236,16 @@
 </p:sld>
 </file>
 
-<file path=ppt/slides/slide3.xml><?xml version="1.0" encoding="utf-8"?>
+<file path=ppt/slides/slide5.xml><?xml version="1.0" encoding="utf-8"?>
 <p:sld xmlns:a="http://schemas.openxmlformats.org/drawingml/2006/main" xmlns:r="http://schemas.openxmlformats.org/officeDocument/2006/relationships" xmlns:p="http://schemas.openxmlformats.org/presentationml/2006/main">
-  <p:cSld name="Slide 3">
+  <p:cSld name="Slide 5">
+    <p:bg>
+      <p:bgPr>
+        <a:solidFill>
+          <a:srgbClr val="FAF8F5"/>
+        </a:solidFill>
+      </p:bgPr>
+    </p:bg>
     <p:spTree>
       <p:nvGrpSpPr>
         <p:cNvPr id="1" name=""/>
@@ -2691,13 +3269,13 @@
         <p:spPr>
           <a:xfrm>
             <a:off x="0" y="0"/>
-            <a:ext cx="9144000" cy="5143500"/>
+            <a:ext cx="9144000" cy="822960"/>
           </a:xfrm>
           <a:prstGeom prst="rect">
             <a:avLst/>
           </a:prstGeom>
           <a:solidFill>
-            <a:srgbClr val="FAF8F5"/>
+            <a:srgbClr val="FFFFFF"/>
           </a:solidFill>
           <a:ln/>
         </p:spPr>
@@ -2710,14 +3288,14 @@
         </p:nvSpPr>
         <p:spPr>
           <a:xfrm>
-            <a:off x="0" y="0"/>
-            <a:ext cx="9144000" cy="54864"/>
+            <a:off x="0" y="795528"/>
+            <a:ext cx="9144000" cy="27432"/>
           </a:xfrm>
           <a:prstGeom prst="rect">
             <a:avLst/>
           </a:prstGeom>
           <a:solidFill>
-            <a:srgbClr val="1B2A4A"/>
+            <a:srgbClr val="E9C46A"/>
           </a:solidFill>
           <a:ln/>
         </p:spPr>
@@ -2730,7 +3308,7 @@
         </p:nvSpPr>
         <p:spPr>
           <a:xfrm>
-            <a:off x="640080" y="320040"/>
+            <a:off x="640080" y="91440"/>
             <a:ext cx="7863840" cy="640080"/>
           </a:xfrm>
           <a:prstGeom prst="rect">
@@ -2747,7 +3325,7 @@
               <a:buNone/>
             </a:pPr>
             <a:r>
-              <a:rPr lang="en-US" sz="2600" b="1" dirty="0">
+              <a:rPr lang="en-US" sz="2200" b="1" dirty="0">
                 <a:solidFill>
                   <a:srgbClr val="1B2A4A"/>
                 </a:solidFill>
@@ -2755,9 +3333,9 @@
                 <a:ea typeface="Georgia" pitchFamily="34" charset="-122"/>
                 <a:cs typeface="Georgia" pitchFamily="34" charset="-120"/>
               </a:rPr>
-              <a:t>Food Chains vs Food Webs</a:t>
-            </a:r>
-            <a:endParaRPr lang="en-US" sz="2600" dirty="0"/>
+              <a:t>Food Webs</a:t>
+            </a:r>
+            <a:endParaRPr lang="en-US" sz="2200" dirty="0"/>
           </a:p>
         </p:txBody>
       </p:sp>
@@ -2769,8 +3347,8 @@
         </p:nvSpPr>
         <p:spPr>
           <a:xfrm>
-            <a:off x="640080" y="1188720"/>
-            <a:ext cx="7863840" cy="3200400"/>
+            <a:off x="640080" y="1005840"/>
+            <a:ext cx="7863840" cy="2926080"/>
           </a:xfrm>
           <a:prstGeom prst="rect">
             <a:avLst/>
@@ -2779,18 +3357,18 @@
           <a:ln/>
         </p:spPr>
         <p:txBody>
-          <a:bodyPr wrap="square" rtlCol="0" anchor="t"/>
+          <a:bodyPr wrap="square" rtlCol="0" anchor="ctr"/>
           <a:lstStyle/>
           <a:p>
             <a:pPr marL="342900" indent="-342900">
-              <a:lnSpc>
-                <a:spcPct val="140000"/>
-              </a:lnSpc>
+              <a:spcAft>
+                <a:spcPts val="800"/>
+              </a:spcAft>
               <a:buSzPct val="100000"/>
               <a:buChar char="•"/>
             </a:pPr>
             <a:r>
-              <a:rPr lang="en-US" sz="1500" dirty="0">
+              <a:rPr lang="en-US" sz="1600" dirty="0">
                 <a:solidFill>
                   <a:srgbClr val="3D3A36"/>
                 </a:solidFill>
@@ -2798,20 +3376,20 @@
                 <a:ea typeface="Calibri" pitchFamily="34" charset="-122"/>
                 <a:cs typeface="Calibri" pitchFamily="34" charset="-120"/>
               </a:rPr>
-              <a:t>A food chain = single pathway of energy transfer.</a:t>
-            </a:r>
-            <a:endParaRPr lang="en-US" sz="1500" dirty="0"/>
+              <a:t>A food web = many food chains connected.</a:t>
+            </a:r>
+            <a:endParaRPr lang="en-US" sz="1600" dirty="0"/>
           </a:p>
           <a:p>
             <a:pPr marL="342900" indent="-342900">
-              <a:lnSpc>
-                <a:spcPct val="140000"/>
-              </a:lnSpc>
+              <a:spcAft>
+                <a:spcPts val="800"/>
+              </a:spcAft>
               <a:buSzPct val="100000"/>
               <a:buChar char="•"/>
             </a:pPr>
             <a:r>
-              <a:rPr lang="en-US" sz="1500" dirty="0">
+              <a:rPr lang="en-US" sz="1600" dirty="0">
                 <a:solidFill>
                   <a:srgbClr val="3D3A36"/>
                 </a:solidFill>
@@ -2819,20 +3397,20 @@
                 <a:ea typeface="Calibri" pitchFamily="34" charset="-122"/>
                 <a:cs typeface="Calibri" pitchFamily="34" charset="-120"/>
               </a:rPr>
-              <a:t>Arrows point FROM prey TO predator (direction of energy flow).</a:t>
-            </a:r>
-            <a:endParaRPr lang="en-US" sz="1500" dirty="0"/>
+              <a:t>More realistic — organisms eat multiple things.</a:t>
+            </a:r>
+            <a:endParaRPr lang="en-US" sz="1600" dirty="0"/>
           </a:p>
           <a:p>
             <a:pPr marL="342900" indent="-342900">
-              <a:lnSpc>
-                <a:spcPct val="140000"/>
-              </a:lnSpc>
+              <a:spcAft>
+                <a:spcPts val="800"/>
+              </a:spcAft>
               <a:buSzPct val="100000"/>
               <a:buChar char="•"/>
             </a:pPr>
             <a:r>
-              <a:rPr lang="en-US" sz="1500" dirty="0">
+              <a:rPr lang="en-US" sz="1600" dirty="0">
                 <a:solidFill>
                   <a:srgbClr val="3D3A36"/>
                 </a:solidFill>
@@ -2840,20 +3418,20 @@
                 <a:ea typeface="Calibri" pitchFamily="34" charset="-122"/>
                 <a:cs typeface="Calibri" pitchFamily="34" charset="-120"/>
               </a:rPr>
-              <a:t>A food web = all interconnected food chains in an ecosystem.</a:t>
-            </a:r>
-            <a:endParaRPr lang="en-US" sz="1500" dirty="0"/>
+              <a:t>Shows the complexity of feeding relationships.</a:t>
+            </a:r>
+            <a:endParaRPr lang="en-US" sz="1600" dirty="0"/>
           </a:p>
           <a:p>
             <a:pPr marL="342900" indent="-342900">
-              <a:lnSpc>
-                <a:spcPct val="140000"/>
-              </a:lnSpc>
+              <a:spcAft>
+                <a:spcPts val="800"/>
+              </a:spcAft>
               <a:buSzPct val="100000"/>
               <a:buChar char="•"/>
             </a:pPr>
             <a:r>
-              <a:rPr lang="en-US" sz="1500" dirty="0">
+              <a:rPr lang="en-US" sz="1600" dirty="0">
                 <a:solidFill>
                   <a:srgbClr val="3D3A36"/>
                 </a:solidFill>
@@ -2861,9 +3439,9 @@
                 <a:ea typeface="Calibri" pitchFamily="34" charset="-122"/>
                 <a:cs typeface="Calibri" pitchFamily="34" charset="-120"/>
               </a:rPr>
-              <a:t>Food webs are more realistic — most organisms eat multiple things.</a:t>
-            </a:r>
-            <a:endParaRPr lang="en-US" sz="1500" dirty="0"/>
+              <a:t>If one species is removed, it affects many others.</a:t>
+            </a:r>
+            <a:endParaRPr lang="en-US" sz="1600" dirty="0"/>
           </a:p>
         </p:txBody>
       </p:sp>
@@ -2875,30 +3453,55 @@
         </p:nvSpPr>
         <p:spPr>
           <a:xfrm>
-            <a:off x="640080" y="4206240"/>
-            <a:ext cx="7863840" cy="640080"/>
-          </a:xfrm>
-          <a:prstGeom prst="roundRect">
-            <a:avLst>
-              <a:gd name="adj" fmla="val 11429"/>
-            </a:avLst>
+            <a:off x="640080" y="4114800"/>
+            <a:ext cx="7863840" cy="731520"/>
+          </a:xfrm>
+          <a:prstGeom prst="rect">
+            <a:avLst/>
           </a:prstGeom>
           <a:solidFill>
             <a:srgbClr val="E8F5F3"/>
           </a:solidFill>
           <a:ln/>
-        </p:spPr>
-      </p:sp>
-      <p:sp>
-        <p:nvSpPr>
-          <p:cNvPr id="7" name="Text 5"/>
-          <p:cNvSpPr/>
-          <p:nvPr/>
-        </p:nvSpPr>
-        <p:spPr>
-          <a:xfrm>
-            <a:off x="822960" y="4251960"/>
-            <a:ext cx="7498080" cy="548640"/>
+          <a:effectLst>
+            <a:outerShdw sx="100000" sy="100000" kx="0" ky="0" algn="bl" rotWithShape="0" blurRad="76200" dist="25400" dir="8100000">
+              <a:srgbClr val="000000">
+                <a:alpha val="12000"/>
+              </a:srgbClr>
+            </a:outerShdw>
+          </a:effectLst>
+        </p:spPr>
+      </p:sp>
+      <p:sp>
+        <p:nvSpPr>
+          <p:cNvPr id="7" name="Shape 5"/>
+          <p:cNvSpPr/>
+          <p:nvPr/>
+        </p:nvSpPr>
+        <p:spPr>
+          <a:xfrm>
+            <a:off x="640080" y="4114800"/>
+            <a:ext cx="64008" cy="731520"/>
+          </a:xfrm>
+          <a:prstGeom prst="rect">
+            <a:avLst/>
+          </a:prstGeom>
+          <a:solidFill>
+            <a:srgbClr val="E9C46A"/>
+          </a:solidFill>
+          <a:ln/>
+        </p:spPr>
+      </p:sp>
+      <p:sp>
+        <p:nvSpPr>
+          <p:cNvPr id="8" name="Text 6"/>
+          <p:cNvSpPr/>
+          <p:nvPr/>
+        </p:nvSpPr>
+        <p:spPr>
+          <a:xfrm>
+            <a:off x="914400" y="4160520"/>
+            <a:ext cx="7406640" cy="640080"/>
           </a:xfrm>
           <a:prstGeom prst="rect">
             <a:avLst/>
@@ -2914,17 +3517,17 @@
               <a:buNone/>
             </a:pPr>
             <a:r>
-              <a:rPr lang="en-US" sz="1200" i="1" dirty="0">
+              <a:rPr lang="en-US" sz="1300" i="1" dirty="0">
                 <a:solidFill>
-                  <a:srgbClr val="2A9D8F"/>
+                  <a:srgbClr val="3D3A36"/>
                 </a:solidFill>
                 <a:latin typeface="Calibri" pitchFamily="34" charset="0"/>
                 <a:ea typeface="Calibri" pitchFamily="34" charset="-122"/>
                 <a:cs typeface="Calibri" pitchFamily="34" charset="-120"/>
               </a:rPr>
-              <a:t>Arrow direction matters! Arrow = 'energy flows to'</a:t>
-            </a:r>
-            <a:endParaRPr lang="en-US" sz="1200" dirty="0"/>
+              <a:t>Food webs show INTERDEPENDENCE — organisms depend on each other.</a:t>
+            </a:r>
+            <a:endParaRPr lang="en-US" sz="1300" dirty="0"/>
           </a:p>
         </p:txBody>
       </p:sp>
@@ -2936,9 +3539,16 @@
 </p:sld>
 </file>
 
-<file path=ppt/slides/slide4.xml><?xml version="1.0" encoding="utf-8"?>
+<file path=ppt/slides/slide6.xml><?xml version="1.0" encoding="utf-8"?>
 <p:sld xmlns:a="http://schemas.openxmlformats.org/drawingml/2006/main" xmlns:r="http://schemas.openxmlformats.org/officeDocument/2006/relationships" xmlns:p="http://schemas.openxmlformats.org/presentationml/2006/main">
-  <p:cSld name="Slide 4">
+  <p:cSld name="Slide 6">
+    <p:bg>
+      <p:bgPr>
+        <a:solidFill>
+          <a:srgbClr val="FAF8F5"/>
+        </a:solidFill>
+      </p:bgPr>
+    </p:bg>
     <p:spTree>
       <p:nvGrpSpPr>
         <p:cNvPr id="1" name=""/>
@@ -2962,6 +3572,944 @@
         <p:spPr>
           <a:xfrm>
             <a:off x="0" y="0"/>
+            <a:ext cx="9144000" cy="822960"/>
+          </a:xfrm>
+          <a:prstGeom prst="rect">
+            <a:avLst/>
+          </a:prstGeom>
+          <a:solidFill>
+            <a:srgbClr val="FFFFFF"/>
+          </a:solidFill>
+          <a:ln/>
+        </p:spPr>
+      </p:sp>
+      <p:sp>
+        <p:nvSpPr>
+          <p:cNvPr id="3" name="Shape 1"/>
+          <p:cNvSpPr/>
+          <p:nvPr/>
+        </p:nvSpPr>
+        <p:spPr>
+          <a:xfrm>
+            <a:off x="0" y="795528"/>
+            <a:ext cx="9144000" cy="27432"/>
+          </a:xfrm>
+          <a:prstGeom prst="rect">
+            <a:avLst/>
+          </a:prstGeom>
+          <a:solidFill>
+            <a:srgbClr val="E9C46A"/>
+          </a:solidFill>
+          <a:ln/>
+        </p:spPr>
+      </p:sp>
+      <p:sp>
+        <p:nvSpPr>
+          <p:cNvPr id="4" name="Text 2"/>
+          <p:cNvSpPr/>
+          <p:nvPr/>
+        </p:nvSpPr>
+        <p:spPr>
+          <a:xfrm>
+            <a:off x="640080" y="91440"/>
+            <a:ext cx="7863840" cy="640080"/>
+          </a:xfrm>
+          <a:prstGeom prst="rect">
+            <a:avLst/>
+          </a:prstGeom>
+          <a:noFill/>
+          <a:ln/>
+        </p:spPr>
+        <p:txBody>
+          <a:bodyPr wrap="square" lIns="0" tIns="0" rIns="0" bIns="0" rtlCol="0" anchor="ctr"/>
+          <a:lstStyle/>
+          <a:p>
+            <a:pPr indent="0" marL="0">
+              <a:buNone/>
+            </a:pPr>
+            <a:r>
+              <a:rPr lang="en-US" sz="2200" b="1" dirty="0">
+                <a:solidFill>
+                  <a:srgbClr val="1B2A4A"/>
+                </a:solidFill>
+                <a:latin typeface="Georgia" pitchFamily="34" charset="0"/>
+                <a:ea typeface="Georgia" pitchFamily="34" charset="-122"/>
+                <a:cs typeface="Georgia" pitchFamily="34" charset="-120"/>
+              </a:rPr>
+              <a:t>The 10% Rule</a:t>
+            </a:r>
+            <a:endParaRPr lang="en-US" sz="2200" dirty="0"/>
+          </a:p>
+        </p:txBody>
+      </p:sp>
+      <p:sp>
+        <p:nvSpPr>
+          <p:cNvPr id="5" name="Text 3"/>
+          <p:cNvSpPr/>
+          <p:nvPr/>
+        </p:nvSpPr>
+        <p:spPr>
+          <a:xfrm>
+            <a:off x="640080" y="1005840"/>
+            <a:ext cx="7863840" cy="2926080"/>
+          </a:xfrm>
+          <a:prstGeom prst="rect">
+            <a:avLst/>
+          </a:prstGeom>
+          <a:noFill/>
+          <a:ln/>
+        </p:spPr>
+        <p:txBody>
+          <a:bodyPr wrap="square" rtlCol="0" anchor="ctr"/>
+          <a:lstStyle/>
+          <a:p>
+            <a:pPr marL="342900" indent="-342900">
+              <a:spcAft>
+                <a:spcPts val="800"/>
+              </a:spcAft>
+              <a:buSzPct val="100000"/>
+              <a:buChar char="•"/>
+            </a:pPr>
+            <a:r>
+              <a:rPr lang="en-US" sz="1600" dirty="0">
+                <a:solidFill>
+                  <a:srgbClr val="3D3A36"/>
+                </a:solidFill>
+                <a:latin typeface="Calibri" pitchFamily="34" charset="0"/>
+                <a:ea typeface="Calibri" pitchFamily="34" charset="-122"/>
+                <a:cs typeface="Calibri" pitchFamily="34" charset="-120"/>
+              </a:rPr>
+              <a:t>Only ~10% of energy passes to the next trophic level.</a:t>
+            </a:r>
+            <a:endParaRPr lang="en-US" sz="1600" dirty="0"/>
+          </a:p>
+          <a:p>
+            <a:pPr marL="342900" indent="-342900">
+              <a:spcAft>
+                <a:spcPts val="800"/>
+              </a:spcAft>
+              <a:buSzPct val="100000"/>
+              <a:buChar char="•"/>
+            </a:pPr>
+            <a:r>
+              <a:rPr lang="en-US" sz="1600" dirty="0">
+                <a:solidFill>
+                  <a:srgbClr val="3D3A36"/>
+                </a:solidFill>
+                <a:latin typeface="Calibri" pitchFamily="34" charset="0"/>
+                <a:ea typeface="Calibri" pitchFamily="34" charset="-122"/>
+                <a:cs typeface="Calibri" pitchFamily="34" charset="-120"/>
+              </a:rPr>
+              <a:t>The rest: heat (respiration), waste, movement.</a:t>
+            </a:r>
+            <a:endParaRPr lang="en-US" sz="1600" dirty="0"/>
+          </a:p>
+          <a:p>
+            <a:pPr marL="342900" indent="-342900">
+              <a:spcAft>
+                <a:spcPts val="800"/>
+              </a:spcAft>
+              <a:buSzPct val="100000"/>
+              <a:buChar char="•"/>
+            </a:pPr>
+            <a:r>
+              <a:rPr lang="en-US" sz="1600" dirty="0">
+                <a:solidFill>
+                  <a:srgbClr val="3D3A36"/>
+                </a:solidFill>
+                <a:latin typeface="Calibri" pitchFamily="34" charset="0"/>
+                <a:ea typeface="Calibri" pitchFamily="34" charset="-122"/>
+                <a:cs typeface="Calibri" pitchFamily="34" charset="-120"/>
+              </a:rPr>
+              <a:t>This is why food chains are short (4–5 levels max).</a:t>
+            </a:r>
+            <a:endParaRPr lang="en-US" sz="1600" dirty="0"/>
+          </a:p>
+          <a:p>
+            <a:pPr marL="342900" indent="-342900">
+              <a:spcAft>
+                <a:spcPts val="800"/>
+              </a:spcAft>
+              <a:buSzPct val="100000"/>
+              <a:buChar char="•"/>
+            </a:pPr>
+            <a:r>
+              <a:rPr lang="en-US" sz="1600" dirty="0">
+                <a:solidFill>
+                  <a:srgbClr val="3D3A36"/>
+                </a:solidFill>
+                <a:latin typeface="Calibri" pitchFamily="34" charset="0"/>
+                <a:ea typeface="Calibri" pitchFamily="34" charset="-122"/>
+                <a:cs typeface="Calibri" pitchFamily="34" charset="-120"/>
+              </a:rPr>
+              <a:t>Producers have MOST energy. Top predators have LEAST.</a:t>
+            </a:r>
+            <a:endParaRPr lang="en-US" sz="1600" dirty="0"/>
+          </a:p>
+        </p:txBody>
+      </p:sp>
+      <p:sp>
+        <p:nvSpPr>
+          <p:cNvPr id="6" name="Shape 4"/>
+          <p:cNvSpPr/>
+          <p:nvPr/>
+        </p:nvSpPr>
+        <p:spPr>
+          <a:xfrm>
+            <a:off x="640080" y="4114800"/>
+            <a:ext cx="7863840" cy="731520"/>
+          </a:xfrm>
+          <a:prstGeom prst="rect">
+            <a:avLst/>
+          </a:prstGeom>
+          <a:solidFill>
+            <a:srgbClr val="E8F5F3"/>
+          </a:solidFill>
+          <a:ln/>
+          <a:effectLst>
+            <a:outerShdw sx="100000" sy="100000" kx="0" ky="0" algn="bl" rotWithShape="0" blurRad="76200" dist="25400" dir="8100000">
+              <a:srgbClr val="000000">
+                <a:alpha val="12000"/>
+              </a:srgbClr>
+            </a:outerShdw>
+          </a:effectLst>
+        </p:spPr>
+      </p:sp>
+      <p:sp>
+        <p:nvSpPr>
+          <p:cNvPr id="7" name="Shape 5"/>
+          <p:cNvSpPr/>
+          <p:nvPr/>
+        </p:nvSpPr>
+        <p:spPr>
+          <a:xfrm>
+            <a:off x="640080" y="4114800"/>
+            <a:ext cx="64008" cy="731520"/>
+          </a:xfrm>
+          <a:prstGeom prst="rect">
+            <a:avLst/>
+          </a:prstGeom>
+          <a:solidFill>
+            <a:srgbClr val="E9C46A"/>
+          </a:solidFill>
+          <a:ln/>
+        </p:spPr>
+      </p:sp>
+      <p:sp>
+        <p:nvSpPr>
+          <p:cNvPr id="8" name="Text 6"/>
+          <p:cNvSpPr/>
+          <p:nvPr/>
+        </p:nvSpPr>
+        <p:spPr>
+          <a:xfrm>
+            <a:off x="914400" y="4160520"/>
+            <a:ext cx="7406640" cy="640080"/>
+          </a:xfrm>
+          <a:prstGeom prst="rect">
+            <a:avLst/>
+          </a:prstGeom>
+          <a:noFill/>
+          <a:ln/>
+        </p:spPr>
+        <p:txBody>
+          <a:bodyPr wrap="square" rtlCol="0" anchor="ctr"/>
+          <a:lstStyle/>
+          <a:p>
+            <a:pPr indent="0" marL="0">
+              <a:buNone/>
+            </a:pPr>
+            <a:r>
+              <a:rPr lang="en-US" sz="1300" i="1" dirty="0">
+                <a:solidFill>
+                  <a:srgbClr val="3D3A36"/>
+                </a:solidFill>
+                <a:latin typeface="Calibri" pitchFamily="34" charset="0"/>
+                <a:ea typeface="Calibri" pitchFamily="34" charset="-122"/>
+                <a:cs typeface="Calibri" pitchFamily="34" charset="-120"/>
+              </a:rPr>
+              <a:t>This explains why there are fewer tigers than deer.</a:t>
+            </a:r>
+            <a:endParaRPr lang="en-US" sz="1300" dirty="0"/>
+          </a:p>
+        </p:txBody>
+      </p:sp>
+    </p:spTree>
+  </p:cSld>
+  <p:clrMapOvr>
+    <a:masterClrMapping/>
+  </p:clrMapOvr>
+</p:sld>
+</file>
+
+<file path=ppt/slides/slide7.xml><?xml version="1.0" encoding="utf-8"?>
+<p:sld xmlns:a="http://schemas.openxmlformats.org/drawingml/2006/main" xmlns:r="http://schemas.openxmlformats.org/officeDocument/2006/relationships" xmlns:p="http://schemas.openxmlformats.org/presentationml/2006/main">
+  <p:cSld name="Slide 7">
+    <p:bg>
+      <p:bgPr>
+        <a:solidFill>
+          <a:srgbClr val="FAF8F5"/>
+        </a:solidFill>
+      </p:bgPr>
+    </p:bg>
+    <p:spTree>
+      <p:nvGrpSpPr>
+        <p:cNvPr id="1" name=""/>
+        <p:cNvGrpSpPr/>
+        <p:nvPr/>
+      </p:nvGrpSpPr>
+      <p:grpSpPr>
+        <a:xfrm>
+          <a:off x="0" y="0"/>
+          <a:ext cx="0" cy="0"/>
+          <a:chOff x="0" y="0"/>
+          <a:chExt cx="0" cy="0"/>
+        </a:xfrm>
+      </p:grpSpPr>
+      <p:sp>
+        <p:nvSpPr>
+          <p:cNvPr id="2" name="Shape 0"/>
+          <p:cNvSpPr/>
+          <p:nvPr/>
+        </p:nvSpPr>
+        <p:spPr>
+          <a:xfrm>
+            <a:off x="0" y="0"/>
+            <a:ext cx="9144000" cy="822960"/>
+          </a:xfrm>
+          <a:prstGeom prst="rect">
+            <a:avLst/>
+          </a:prstGeom>
+          <a:solidFill>
+            <a:srgbClr val="FFFFFF"/>
+          </a:solidFill>
+          <a:ln/>
+        </p:spPr>
+      </p:sp>
+      <p:sp>
+        <p:nvSpPr>
+          <p:cNvPr id="3" name="Shape 1"/>
+          <p:cNvSpPr/>
+          <p:nvPr/>
+        </p:nvSpPr>
+        <p:spPr>
+          <a:xfrm>
+            <a:off x="0" y="795528"/>
+            <a:ext cx="9144000" cy="27432"/>
+          </a:xfrm>
+          <a:prstGeom prst="rect">
+            <a:avLst/>
+          </a:prstGeom>
+          <a:solidFill>
+            <a:srgbClr val="E9C46A"/>
+          </a:solidFill>
+          <a:ln/>
+        </p:spPr>
+      </p:sp>
+      <p:sp>
+        <p:nvSpPr>
+          <p:cNvPr id="4" name="Text 2"/>
+          <p:cNvSpPr/>
+          <p:nvPr/>
+        </p:nvSpPr>
+        <p:spPr>
+          <a:xfrm>
+            <a:off x="640080" y="91440"/>
+            <a:ext cx="7863840" cy="640080"/>
+          </a:xfrm>
+          <a:prstGeom prst="rect">
+            <a:avLst/>
+          </a:prstGeom>
+          <a:noFill/>
+          <a:ln/>
+        </p:spPr>
+        <p:txBody>
+          <a:bodyPr wrap="square" lIns="0" tIns="0" rIns="0" bIns="0" rtlCol="0" anchor="ctr"/>
+          <a:lstStyle/>
+          <a:p>
+            <a:pPr indent="0" marL="0">
+              <a:buNone/>
+            </a:pPr>
+            <a:r>
+              <a:rPr lang="en-US" sz="2200" b="1" dirty="0">
+                <a:solidFill>
+                  <a:srgbClr val="1B2A4A"/>
+                </a:solidFill>
+                <a:latin typeface="Georgia" pitchFamily="34" charset="0"/>
+                <a:ea typeface="Georgia" pitchFamily="34" charset="-122"/>
+                <a:cs typeface="Georgia" pitchFamily="34" charset="-120"/>
+              </a:rPr>
+              <a:t>Recommended Videos</a:t>
+            </a:r>
+            <a:endParaRPr lang="en-US" sz="2200" dirty="0"/>
+          </a:p>
+        </p:txBody>
+      </p:sp>
+      <p:sp>
+        <p:nvSpPr>
+          <p:cNvPr id="5" name="Text 3"/>
+          <p:cNvSpPr/>
+          <p:nvPr/>
+        </p:nvSpPr>
+        <p:spPr>
+          <a:xfrm>
+            <a:off x="640080" y="868680"/>
+            <a:ext cx="7863840" cy="274320"/>
+          </a:xfrm>
+          <a:prstGeom prst="rect">
+            <a:avLst/>
+          </a:prstGeom>
+          <a:noFill/>
+          <a:ln/>
+        </p:spPr>
+        <p:txBody>
+          <a:bodyPr wrap="square" rtlCol="0" anchor="ctr"/>
+          <a:lstStyle/>
+          <a:p>
+            <a:pPr indent="0" marL="0">
+              <a:buNone/>
+            </a:pPr>
+            <a:r>
+              <a:rPr lang="en-US" sz="1200" i="1" dirty="0">
+                <a:solidFill>
+                  <a:srgbClr val="6B6660"/>
+                </a:solidFill>
+                <a:latin typeface="Calibri" pitchFamily="34" charset="0"/>
+                <a:ea typeface="Calibri" pitchFamily="34" charset="-122"/>
+                <a:cs typeface="Calibri" pitchFamily="34" charset="-120"/>
+              </a:rPr>
+              <a:t>Search these on YouTube to learn more.</a:t>
+            </a:r>
+            <a:endParaRPr lang="en-US" sz="1200" dirty="0"/>
+          </a:p>
+        </p:txBody>
+      </p:sp>
+      <p:sp>
+        <p:nvSpPr>
+          <p:cNvPr id="6" name="Shape 4"/>
+          <p:cNvSpPr/>
+          <p:nvPr/>
+        </p:nvSpPr>
+        <p:spPr>
+          <a:xfrm>
+            <a:off x="457200" y="1234440"/>
+            <a:ext cx="8229600" cy="1051560"/>
+          </a:xfrm>
+          <a:prstGeom prst="rect">
+            <a:avLst/>
+          </a:prstGeom>
+          <a:solidFill>
+            <a:srgbClr val="FFFFFF"/>
+          </a:solidFill>
+          <a:ln/>
+          <a:effectLst>
+            <a:outerShdw sx="100000" sy="100000" kx="0" ky="0" algn="bl" rotWithShape="0" blurRad="76200" dist="25400" dir="8100000">
+              <a:srgbClr val="000000">
+                <a:alpha val="12000"/>
+              </a:srgbClr>
+            </a:outerShdw>
+          </a:effectLst>
+        </p:spPr>
+      </p:sp>
+      <p:sp>
+        <p:nvSpPr>
+          <p:cNvPr id="7" name="Shape 5"/>
+          <p:cNvSpPr/>
+          <p:nvPr/>
+        </p:nvSpPr>
+        <p:spPr>
+          <a:xfrm>
+            <a:off x="457200" y="1234440"/>
+            <a:ext cx="64008" cy="1051560"/>
+          </a:xfrm>
+          <a:prstGeom prst="rect">
+            <a:avLst/>
+          </a:prstGeom>
+          <a:solidFill>
+            <a:srgbClr val="E9C46A"/>
+          </a:solidFill>
+          <a:ln/>
+        </p:spPr>
+      </p:sp>
+      <p:sp>
+        <p:nvSpPr>
+          <p:cNvPr id="8" name="Text 6"/>
+          <p:cNvSpPr/>
+          <p:nvPr/>
+        </p:nvSpPr>
+        <p:spPr>
+          <a:xfrm>
+            <a:off x="640080" y="1325880"/>
+            <a:ext cx="457200" cy="457200"/>
+          </a:xfrm>
+          <a:prstGeom prst="rect">
+            <a:avLst/>
+          </a:prstGeom>
+          <a:noFill/>
+          <a:ln/>
+        </p:spPr>
+        <p:txBody>
+          <a:bodyPr wrap="square" rtlCol="0" anchor="ctr"/>
+          <a:lstStyle/>
+          <a:p>
+            <a:pPr algn="ctr" indent="0" marL="0">
+              <a:buNone/>
+            </a:pPr>
+            <a:r>
+              <a:rPr lang="en-US" sz="2000" dirty="0">
+                <a:solidFill>
+                  <a:srgbClr val="E9C46A"/>
+                </a:solidFill>
+                <a:latin typeface="Calibri" pitchFamily="34" charset="0"/>
+                <a:ea typeface="Calibri" pitchFamily="34" charset="-122"/>
+                <a:cs typeface="Calibri" pitchFamily="34" charset="-120"/>
+              </a:rPr>
+              <a:t>▶</a:t>
+            </a:r>
+            <a:endParaRPr lang="en-US" sz="2000" dirty="0"/>
+          </a:p>
+        </p:txBody>
+      </p:sp>
+      <p:sp>
+        <p:nvSpPr>
+          <p:cNvPr id="9" name="Text 7"/>
+          <p:cNvSpPr/>
+          <p:nvPr/>
+        </p:nvSpPr>
+        <p:spPr>
+          <a:xfrm>
+            <a:off x="1188720" y="1307592"/>
+            <a:ext cx="7132320" cy="411480"/>
+          </a:xfrm>
+          <a:prstGeom prst="rect">
+            <a:avLst/>
+          </a:prstGeom>
+          <a:noFill/>
+          <a:ln/>
+        </p:spPr>
+        <p:txBody>
+          <a:bodyPr wrap="square" rtlCol="0" anchor="ctr"/>
+          <a:lstStyle/>
+          <a:p>
+            <a:pPr indent="0" marL="0">
+              <a:buNone/>
+            </a:pPr>
+            <a:r>
+              <a:rPr lang="en-US" sz="1400" b="1" dirty="0">
+                <a:solidFill>
+                  <a:srgbClr val="1B2A4A"/>
+                </a:solidFill>
+                <a:latin typeface="Calibri" pitchFamily="34" charset="0"/>
+                <a:ea typeface="Calibri" pitchFamily="34" charset="-122"/>
+                <a:cs typeface="Calibri" pitchFamily="34" charset="-120"/>
+              </a:rPr>
+              <a:t>Food Chains and Food Webs</a:t>
+            </a:r>
+            <a:endParaRPr lang="en-US" sz="1400" dirty="0"/>
+          </a:p>
+        </p:txBody>
+      </p:sp>
+      <p:sp>
+        <p:nvSpPr>
+          <p:cNvPr id="10" name="Text 8"/>
+          <p:cNvSpPr/>
+          <p:nvPr/>
+        </p:nvSpPr>
+        <p:spPr>
+          <a:xfrm>
+            <a:off x="1188720" y="1691640"/>
+            <a:ext cx="7132320" cy="320040"/>
+          </a:xfrm>
+          <a:prstGeom prst="rect">
+            <a:avLst/>
+          </a:prstGeom>
+          <a:noFill/>
+          <a:ln/>
+        </p:spPr>
+        <p:txBody>
+          <a:bodyPr wrap="square" rtlCol="0" anchor="ctr"/>
+          <a:lstStyle/>
+          <a:p>
+            <a:pPr indent="0" marL="0">
+              <a:buNone/>
+            </a:pPr>
+            <a:r>
+              <a:rPr lang="en-US" sz="1100" dirty="0">
+                <a:solidFill>
+                  <a:srgbClr val="6B6660"/>
+                </a:solidFill>
+                <a:latin typeface="Calibri" pitchFamily="34" charset="0"/>
+                <a:ea typeface="Calibri" pitchFamily="34" charset="-122"/>
+                <a:cs typeface="Calibri" pitchFamily="34" charset="-120"/>
+              </a:rPr>
+              <a:t>FuseSchool  •  5 min</a:t>
+            </a:r>
+            <a:endParaRPr lang="en-US" sz="1100" dirty="0"/>
+          </a:p>
+        </p:txBody>
+      </p:sp>
+      <p:sp>
+        <p:nvSpPr>
+          <p:cNvPr id="11" name="Shape 9"/>
+          <p:cNvSpPr/>
+          <p:nvPr/>
+        </p:nvSpPr>
+        <p:spPr>
+          <a:xfrm>
+            <a:off x="457200" y="2423160"/>
+            <a:ext cx="8229600" cy="1051560"/>
+          </a:xfrm>
+          <a:prstGeom prst="rect">
+            <a:avLst/>
+          </a:prstGeom>
+          <a:solidFill>
+            <a:srgbClr val="FFFFFF"/>
+          </a:solidFill>
+          <a:ln/>
+          <a:effectLst>
+            <a:outerShdw sx="100000" sy="100000" kx="0" ky="0" algn="bl" rotWithShape="0" blurRad="76200" dist="25400" dir="8100000">
+              <a:srgbClr val="000000">
+                <a:alpha val="12000"/>
+              </a:srgbClr>
+            </a:outerShdw>
+          </a:effectLst>
+        </p:spPr>
+      </p:sp>
+      <p:sp>
+        <p:nvSpPr>
+          <p:cNvPr id="12" name="Shape 10"/>
+          <p:cNvSpPr/>
+          <p:nvPr/>
+        </p:nvSpPr>
+        <p:spPr>
+          <a:xfrm>
+            <a:off x="457200" y="2423160"/>
+            <a:ext cx="64008" cy="1051560"/>
+          </a:xfrm>
+          <a:prstGeom prst="rect">
+            <a:avLst/>
+          </a:prstGeom>
+          <a:solidFill>
+            <a:srgbClr val="E9C46A"/>
+          </a:solidFill>
+          <a:ln/>
+        </p:spPr>
+      </p:sp>
+      <p:sp>
+        <p:nvSpPr>
+          <p:cNvPr id="13" name="Text 11"/>
+          <p:cNvSpPr/>
+          <p:nvPr/>
+        </p:nvSpPr>
+        <p:spPr>
+          <a:xfrm>
+            <a:off x="640080" y="2514600"/>
+            <a:ext cx="457200" cy="457200"/>
+          </a:xfrm>
+          <a:prstGeom prst="rect">
+            <a:avLst/>
+          </a:prstGeom>
+          <a:noFill/>
+          <a:ln/>
+        </p:spPr>
+        <p:txBody>
+          <a:bodyPr wrap="square" rtlCol="0" anchor="ctr"/>
+          <a:lstStyle/>
+          <a:p>
+            <a:pPr algn="ctr" indent="0" marL="0">
+              <a:buNone/>
+            </a:pPr>
+            <a:r>
+              <a:rPr lang="en-US" sz="2000" dirty="0">
+                <a:solidFill>
+                  <a:srgbClr val="E9C46A"/>
+                </a:solidFill>
+                <a:latin typeface="Calibri" pitchFamily="34" charset="0"/>
+                <a:ea typeface="Calibri" pitchFamily="34" charset="-122"/>
+                <a:cs typeface="Calibri" pitchFamily="34" charset="-120"/>
+              </a:rPr>
+              <a:t>▶</a:t>
+            </a:r>
+            <a:endParaRPr lang="en-US" sz="2000" dirty="0"/>
+          </a:p>
+        </p:txBody>
+      </p:sp>
+      <p:sp>
+        <p:nvSpPr>
+          <p:cNvPr id="14" name="Text 12"/>
+          <p:cNvSpPr/>
+          <p:nvPr/>
+        </p:nvSpPr>
+        <p:spPr>
+          <a:xfrm>
+            <a:off x="1188720" y="2496312"/>
+            <a:ext cx="7132320" cy="411480"/>
+          </a:xfrm>
+          <a:prstGeom prst="rect">
+            <a:avLst/>
+          </a:prstGeom>
+          <a:noFill/>
+          <a:ln/>
+        </p:spPr>
+        <p:txBody>
+          <a:bodyPr wrap="square" rtlCol="0" anchor="ctr"/>
+          <a:lstStyle/>
+          <a:p>
+            <a:pPr indent="0" marL="0">
+              <a:buNone/>
+            </a:pPr>
+            <a:r>
+              <a:rPr lang="en-US" sz="1400" b="1" dirty="0">
+                <a:solidFill>
+                  <a:srgbClr val="1B2A4A"/>
+                </a:solidFill>
+                <a:latin typeface="Calibri" pitchFamily="34" charset="0"/>
+                <a:ea typeface="Calibri" pitchFamily="34" charset="-122"/>
+                <a:cs typeface="Calibri" pitchFamily="34" charset="-120"/>
+              </a:rPr>
+              <a:t>Producers, Consumers, Decomposers</a:t>
+            </a:r>
+            <a:endParaRPr lang="en-US" sz="1400" dirty="0"/>
+          </a:p>
+        </p:txBody>
+      </p:sp>
+      <p:sp>
+        <p:nvSpPr>
+          <p:cNvPr id="15" name="Text 13"/>
+          <p:cNvSpPr/>
+          <p:nvPr/>
+        </p:nvSpPr>
+        <p:spPr>
+          <a:xfrm>
+            <a:off x="1188720" y="2880360"/>
+            <a:ext cx="7132320" cy="320040"/>
+          </a:xfrm>
+          <a:prstGeom prst="rect">
+            <a:avLst/>
+          </a:prstGeom>
+          <a:noFill/>
+          <a:ln/>
+        </p:spPr>
+        <p:txBody>
+          <a:bodyPr wrap="square" rtlCol="0" anchor="ctr"/>
+          <a:lstStyle/>
+          <a:p>
+            <a:pPr indent="0" marL="0">
+              <a:buNone/>
+            </a:pPr>
+            <a:r>
+              <a:rPr lang="en-US" sz="1100" dirty="0">
+                <a:solidFill>
+                  <a:srgbClr val="6B6660"/>
+                </a:solidFill>
+                <a:latin typeface="Calibri" pitchFamily="34" charset="0"/>
+                <a:ea typeface="Calibri" pitchFamily="34" charset="-122"/>
+                <a:cs typeface="Calibri" pitchFamily="34" charset="-120"/>
+              </a:rPr>
+              <a:t>Crash Course Kids  •  4 min</a:t>
+            </a:r>
+            <a:endParaRPr lang="en-US" sz="1100" dirty="0"/>
+          </a:p>
+        </p:txBody>
+      </p:sp>
+      <p:sp>
+        <p:nvSpPr>
+          <p:cNvPr id="16" name="Shape 14"/>
+          <p:cNvSpPr/>
+          <p:nvPr/>
+        </p:nvSpPr>
+        <p:spPr>
+          <a:xfrm>
+            <a:off x="457200" y="3611880"/>
+            <a:ext cx="8229600" cy="1051560"/>
+          </a:xfrm>
+          <a:prstGeom prst="rect">
+            <a:avLst/>
+          </a:prstGeom>
+          <a:solidFill>
+            <a:srgbClr val="FFFFFF"/>
+          </a:solidFill>
+          <a:ln/>
+          <a:effectLst>
+            <a:outerShdw sx="100000" sy="100000" kx="0" ky="0" algn="bl" rotWithShape="0" blurRad="76200" dist="25400" dir="8100000">
+              <a:srgbClr val="000000">
+                <a:alpha val="12000"/>
+              </a:srgbClr>
+            </a:outerShdw>
+          </a:effectLst>
+        </p:spPr>
+      </p:sp>
+      <p:sp>
+        <p:nvSpPr>
+          <p:cNvPr id="17" name="Shape 15"/>
+          <p:cNvSpPr/>
+          <p:nvPr/>
+        </p:nvSpPr>
+        <p:spPr>
+          <a:xfrm>
+            <a:off x="457200" y="3611880"/>
+            <a:ext cx="64008" cy="1051560"/>
+          </a:xfrm>
+          <a:prstGeom prst="rect">
+            <a:avLst/>
+          </a:prstGeom>
+          <a:solidFill>
+            <a:srgbClr val="E9C46A"/>
+          </a:solidFill>
+          <a:ln/>
+        </p:spPr>
+      </p:sp>
+      <p:sp>
+        <p:nvSpPr>
+          <p:cNvPr id="18" name="Text 16"/>
+          <p:cNvSpPr/>
+          <p:nvPr/>
+        </p:nvSpPr>
+        <p:spPr>
+          <a:xfrm>
+            <a:off x="640080" y="3703320"/>
+            <a:ext cx="457200" cy="457200"/>
+          </a:xfrm>
+          <a:prstGeom prst="rect">
+            <a:avLst/>
+          </a:prstGeom>
+          <a:noFill/>
+          <a:ln/>
+        </p:spPr>
+        <p:txBody>
+          <a:bodyPr wrap="square" rtlCol="0" anchor="ctr"/>
+          <a:lstStyle/>
+          <a:p>
+            <a:pPr algn="ctr" indent="0" marL="0">
+              <a:buNone/>
+            </a:pPr>
+            <a:r>
+              <a:rPr lang="en-US" sz="2000" dirty="0">
+                <a:solidFill>
+                  <a:srgbClr val="E9C46A"/>
+                </a:solidFill>
+                <a:latin typeface="Calibri" pitchFamily="34" charset="0"/>
+                <a:ea typeface="Calibri" pitchFamily="34" charset="-122"/>
+                <a:cs typeface="Calibri" pitchFamily="34" charset="-120"/>
+              </a:rPr>
+              <a:t>▶</a:t>
+            </a:r>
+            <a:endParaRPr lang="en-US" sz="2000" dirty="0"/>
+          </a:p>
+        </p:txBody>
+      </p:sp>
+      <p:sp>
+        <p:nvSpPr>
+          <p:cNvPr id="19" name="Text 17"/>
+          <p:cNvSpPr/>
+          <p:nvPr/>
+        </p:nvSpPr>
+        <p:spPr>
+          <a:xfrm>
+            <a:off x="1188720" y="3685032"/>
+            <a:ext cx="7132320" cy="411480"/>
+          </a:xfrm>
+          <a:prstGeom prst="rect">
+            <a:avLst/>
+          </a:prstGeom>
+          <a:noFill/>
+          <a:ln/>
+        </p:spPr>
+        <p:txBody>
+          <a:bodyPr wrap="square" rtlCol="0" anchor="ctr"/>
+          <a:lstStyle/>
+          <a:p>
+            <a:pPr indent="0" marL="0">
+              <a:buNone/>
+            </a:pPr>
+            <a:r>
+              <a:rPr lang="en-US" sz="1400" b="1" dirty="0">
+                <a:solidFill>
+                  <a:srgbClr val="1B2A4A"/>
+                </a:solidFill>
+                <a:latin typeface="Calibri" pitchFamily="34" charset="0"/>
+                <a:ea typeface="Calibri" pitchFamily="34" charset="-122"/>
+                <a:cs typeface="Calibri" pitchFamily="34" charset="-120"/>
+              </a:rPr>
+              <a:t>Trophic Levels — Energy Flow in Ecosystems</a:t>
+            </a:r>
+            <a:endParaRPr lang="en-US" sz="1400" dirty="0"/>
+          </a:p>
+        </p:txBody>
+      </p:sp>
+      <p:sp>
+        <p:nvSpPr>
+          <p:cNvPr id="20" name="Text 18"/>
+          <p:cNvSpPr/>
+          <p:nvPr/>
+        </p:nvSpPr>
+        <p:spPr>
+          <a:xfrm>
+            <a:off x="1188720" y="4069080"/>
+            <a:ext cx="7132320" cy="320040"/>
+          </a:xfrm>
+          <a:prstGeom prst="rect">
+            <a:avLst/>
+          </a:prstGeom>
+          <a:noFill/>
+          <a:ln/>
+        </p:spPr>
+        <p:txBody>
+          <a:bodyPr wrap="square" rtlCol="0" anchor="ctr"/>
+          <a:lstStyle/>
+          <a:p>
+            <a:pPr indent="0" marL="0">
+              <a:buNone/>
+            </a:pPr>
+            <a:r>
+              <a:rPr lang="en-US" sz="1100" dirty="0">
+                <a:solidFill>
+                  <a:srgbClr val="6B6660"/>
+                </a:solidFill>
+                <a:latin typeface="Calibri" pitchFamily="34" charset="0"/>
+                <a:ea typeface="Calibri" pitchFamily="34" charset="-122"/>
+                <a:cs typeface="Calibri" pitchFamily="34" charset="-120"/>
+              </a:rPr>
+              <a:t>Cognito  •  5 min</a:t>
+            </a:r>
+            <a:endParaRPr lang="en-US" sz="1100" dirty="0"/>
+          </a:p>
+        </p:txBody>
+      </p:sp>
+    </p:spTree>
+  </p:cSld>
+  <p:clrMapOvr>
+    <a:masterClrMapping/>
+  </p:clrMapOvr>
+</p:sld>
+</file>
+
+<file path=ppt/slides/slide8.xml><?xml version="1.0" encoding="utf-8"?>
+<p:sld xmlns:a="http://schemas.openxmlformats.org/drawingml/2006/main" xmlns:r="http://schemas.openxmlformats.org/officeDocument/2006/relationships" xmlns:p="http://schemas.openxmlformats.org/presentationml/2006/main">
+  <p:cSld name="Slide 8">
+    <p:spTree>
+      <p:nvGrpSpPr>
+        <p:cNvPr id="1" name=""/>
+        <p:cNvGrpSpPr/>
+        <p:nvPr/>
+      </p:nvGrpSpPr>
+      <p:grpSpPr>
+        <a:xfrm>
+          <a:off x="0" y="0"/>
+          <a:ext cx="0" cy="0"/>
+          <a:chOff x="0" y="0"/>
+          <a:chExt cx="0" cy="0"/>
+        </a:xfrm>
+      </p:grpSpPr>
+      <p:sp>
+        <p:nvSpPr>
+          <p:cNvPr id="2" name="Shape 0"/>
+          <p:cNvSpPr/>
+          <p:nvPr/>
+        </p:nvSpPr>
+        <p:spPr>
+          <a:xfrm>
+            <a:off x="0" y="0"/>
             <a:ext cx="9144000" cy="5143500"/>
           </a:xfrm>
           <a:prstGeom prst="rect">
@@ -2988,7 +4536,7 @@
             <a:avLst/>
           </a:prstGeom>
           <a:solidFill>
-            <a:srgbClr val="1B2A4A"/>
+            <a:srgbClr val="E9C46A"/>
           </a:solidFill>
           <a:ln/>
         </p:spPr>
@@ -3040,7 +4588,7 @@
         </p:nvSpPr>
         <p:spPr>
           <a:xfrm>
-            <a:off x="731520" y="2468880"/>
+            <a:off x="731520" y="2560320"/>
             <a:ext cx="7680960" cy="548640"/>
           </a:xfrm>
           <a:prstGeom prst="rect">
@@ -3057,48 +4605,9 @@
               <a:buNone/>
             </a:pPr>
             <a:r>
-              <a:rPr lang="en-US" sz="1800" dirty="0">
+              <a:rPr lang="en-US" sz="2000" dirty="0">
                 <a:solidFill>
-                  <a:srgbClr val="1B2A4A"/>
-                </a:solidFill>
-                <a:latin typeface="Calibri" pitchFamily="34" charset="0"/>
-                <a:ea typeface="Calibri" pitchFamily="34" charset="-122"/>
-                <a:cs typeface="Calibri" pitchFamily="34" charset="-120"/>
-              </a:rPr>
-              <a:t>learnlattice.org/students/exam-revision</a:t>
-            </a:r>
-            <a:endParaRPr lang="en-US" sz="1800" dirty="0"/>
-          </a:p>
-        </p:txBody>
-      </p:sp>
-      <p:sp>
-        <p:nvSpPr>
-          <p:cNvPr id="6" name="Text 4"/>
-          <p:cNvSpPr/>
-          <p:nvPr/>
-        </p:nvSpPr>
-        <p:spPr>
-          <a:xfrm>
-            <a:off x="731520" y="3200400"/>
-            <a:ext cx="7680960" cy="457200"/>
-          </a:xfrm>
-          <a:prstGeom prst="rect">
-            <a:avLst/>
-          </a:prstGeom>
-          <a:noFill/>
-          <a:ln/>
-        </p:spPr>
-        <p:txBody>
-          <a:bodyPr wrap="square" rtlCol="0" anchor="ctr"/>
-          <a:lstStyle/>
-          <a:p>
-            <a:pPr algn="ctr" indent="0" marL="0">
-              <a:buNone/>
-            </a:pPr>
-            <a:r>
-              <a:rPr lang="en-US" sz="1400" dirty="0">
-                <a:solidFill>
-                  <a:srgbClr val="9B9690"/>
+                  <a:srgbClr val="E9C46A"/>
                 </a:solidFill>
                 <a:latin typeface="Calibri" pitchFamily="34" charset="0"/>
                 <a:ea typeface="Calibri" pitchFamily="34" charset="-122"/>
@@ -3106,7 +4615,7 @@
               </a:rPr>
               <a:t>mrzocchi.com</a:t>
             </a:r>
-            <a:endParaRPr lang="en-US" sz="1400" dirty="0"/>
+            <a:endParaRPr lang="en-US" sz="2000" dirty="0"/>
           </a:p>
         </p:txBody>
       </p:sp>
